--- a/templates/강의계획서_마스터템플릿.pptx
+++ b/templates/강의계획서_마스터템플릿.pptx
@@ -681,7 +681,13 @@
         </p:spPr>
         <p:txBody>
           <a:bodyPr/>
-          <a:p/>
+          <a:lstStyle/>
+          <a:p>
+            <a:endParaRPr>
+              <a:latin typeface="페이퍼로지 5 Medium" pitchFamily="2" charset="-127"/>
+              <a:ea typeface="페이퍼로지 5 Medium" pitchFamily="2" charset="-127"/>
+            </a:endParaRPr>
+          </a:p>
         </p:txBody>
       </p:sp>
       <p:sp>
@@ -718,15 +724,15 @@
                 <a:solidFill>
                   <a:srgbClr val="FFFFFF"/>
                 </a:solidFill>
-                <a:latin typeface="Pretendard Medium" panose="02000603000000020004" pitchFamily="2" charset="-127"/>
-                <a:ea typeface="Pretendard Medium" panose="02000603000000020004" pitchFamily="2" charset="-127"/>
+                <a:latin typeface="페이퍼로지 5 Medium" pitchFamily="2" charset="-127"/>
+                <a:ea typeface="페이퍼로지 5 Medium" pitchFamily="2" charset="-127"/>
                 <a:cs typeface="Pretendard Medium" panose="02000603000000020004" pitchFamily="2" charset="-127"/>
               </a:rPr>
               <a:t>{{강좌유형}}</a:t>
             </a:r>
             <a:endParaRPr lang="en-US" sz="975" dirty="0">
-              <a:latin typeface="Pretendard Medium" panose="02000603000000020004" pitchFamily="2" charset="-127"/>
-              <a:ea typeface="Pretendard Medium" panose="02000603000000020004" pitchFamily="2" charset="-127"/>
+              <a:latin typeface="페이퍼로지 5 Medium" pitchFamily="2" charset="-127"/>
+              <a:ea typeface="페이퍼로지 5 Medium" pitchFamily="2" charset="-127"/>
               <a:cs typeface="Pretendard Medium" panose="02000603000000020004" pitchFamily="2" charset="-127"/>
             </a:endParaRPr>
           </a:p>
@@ -760,7 +766,13 @@
         </p:spPr>
         <p:txBody>
           <a:bodyPr/>
-          <a:p/>
+          <a:lstStyle/>
+          <a:p>
+            <a:endParaRPr>
+              <a:latin typeface="페이퍼로지 5 Medium" pitchFamily="2" charset="-127"/>
+              <a:ea typeface="페이퍼로지 5 Medium" pitchFamily="2" charset="-127"/>
+            </a:endParaRPr>
+          </a:p>
         </p:txBody>
       </p:sp>
       <p:sp>
@@ -797,15 +809,15 @@
                 <a:solidFill>
                   <a:srgbClr val="2B2B2B"/>
                 </a:solidFill>
-                <a:latin typeface="Pretendard Medium" panose="02000603000000020004" pitchFamily="2" charset="-127"/>
-                <a:ea typeface="Pretendard Medium" panose="02000603000000020004" pitchFamily="2" charset="-127"/>
+                <a:latin typeface="페이퍼로지 5 Medium" pitchFamily="2" charset="-127"/>
+                <a:ea typeface="페이퍼로지 5 Medium" pitchFamily="2" charset="-127"/>
                 <a:cs typeface="Pretendard Medium" panose="02000603000000020004" pitchFamily="2" charset="-127"/>
               </a:rPr>
               <a:t>{{구분}}</a:t>
             </a:r>
             <a:endParaRPr lang="en-US" sz="975" dirty="0">
-              <a:latin typeface="Pretendard Medium" panose="02000603000000020004" pitchFamily="2" charset="-127"/>
-              <a:ea typeface="Pretendard Medium" panose="02000603000000020004" pitchFamily="2" charset="-127"/>
+              <a:latin typeface="페이퍼로지 5 Medium" pitchFamily="2" charset="-127"/>
+              <a:ea typeface="페이퍼로지 5 Medium" pitchFamily="2" charset="-127"/>
               <a:cs typeface="Pretendard Medium" panose="02000603000000020004" pitchFamily="2" charset="-127"/>
             </a:endParaRPr>
           </a:p>
@@ -834,7 +846,13 @@
         </p:spPr>
         <p:txBody>
           <a:bodyPr/>
-          <a:p/>
+          <a:lstStyle/>
+          <a:p>
+            <a:endParaRPr>
+              <a:latin typeface="페이퍼로지 5 Medium" pitchFamily="2" charset="-127"/>
+              <a:ea typeface="페이퍼로지 5 Medium" pitchFamily="2" charset="-127"/>
+            </a:endParaRPr>
+          </a:p>
         </p:txBody>
       </p:sp>
       <p:sp>
@@ -871,15 +889,15 @@
                 <a:solidFill>
                   <a:srgbClr val="4A4A4A"/>
                 </a:solidFill>
-                <a:latin typeface="Pretendard Medium" panose="02000603000000020004" pitchFamily="2" charset="-127"/>
-                <a:ea typeface="Pretendard Medium" panose="02000603000000020004" pitchFamily="2" charset="-127"/>
+                <a:latin typeface="페이퍼로지 5 Medium" pitchFamily="2" charset="-127"/>
+                <a:ea typeface="페이퍼로지 5 Medium" pitchFamily="2" charset="-127"/>
                 <a:cs typeface="Pretendard Medium" panose="02000603000000020004" pitchFamily="2" charset="-127"/>
               </a:rPr>
               <a:t>{{학년}}</a:t>
             </a:r>
             <a:endParaRPr lang="en-US" sz="975" dirty="0">
-              <a:latin typeface="Pretendard Medium" panose="02000603000000020004" pitchFamily="2" charset="-127"/>
-              <a:ea typeface="Pretendard Medium" panose="02000603000000020004" pitchFamily="2" charset="-127"/>
+              <a:latin typeface="페이퍼로지 5 Medium" pitchFamily="2" charset="-127"/>
+              <a:ea typeface="페이퍼로지 5 Medium" pitchFamily="2" charset="-127"/>
               <a:cs typeface="Pretendard Medium" panose="02000603000000020004" pitchFamily="2" charset="-127"/>
             </a:endParaRPr>
           </a:p>
@@ -916,15 +934,15 @@
                 <a:solidFill>
                   <a:srgbClr val="8A8A8A"/>
                 </a:solidFill>
-                <a:latin typeface="Pretendard Medium" panose="02000603000000020004" pitchFamily="2" charset="-127"/>
-                <a:ea typeface="Pretendard Medium" panose="02000603000000020004" pitchFamily="2" charset="-127"/>
+                <a:latin typeface="페이퍼로지 5 Medium" pitchFamily="2" charset="-127"/>
+                <a:ea typeface="페이퍼로지 5 Medium" pitchFamily="2" charset="-127"/>
                 <a:cs typeface="Pretendard Medium" panose="02000603000000020004" pitchFamily="2" charset="-127"/>
               </a:rPr>
               <a:t>{{서브슬로건}}</a:t>
             </a:r>
             <a:endParaRPr lang="en-US" sz="1050" dirty="0">
-              <a:latin typeface="Pretendard Medium" panose="02000603000000020004" pitchFamily="2" charset="-127"/>
-              <a:ea typeface="Pretendard Medium" panose="02000603000000020004" pitchFamily="2" charset="-127"/>
+              <a:latin typeface="페이퍼로지 5 Medium" pitchFamily="2" charset="-127"/>
+              <a:ea typeface="페이퍼로지 5 Medium" pitchFamily="2" charset="-127"/>
               <a:cs typeface="Pretendard Medium" panose="02000603000000020004" pitchFamily="2" charset="-127"/>
             </a:endParaRPr>
           </a:p>
@@ -949,7 +967,7 @@
         </p:spPr>
         <p:txBody>
           <a:bodyPr wrap="square" lIns="25400" tIns="25400" rIns="25400" bIns="25400" rtlCol="0" anchor="t">
-            <a:normAutofit fontScale="92500" lnSpcReduction="10000"/>
+            <a:normAutofit/>
           </a:bodyPr>
           <a:lstStyle/>
           <a:p>
@@ -964,15 +982,15 @@
                 <a:solidFill>
                   <a:srgbClr val="161616"/>
                 </a:solidFill>
-                <a:latin typeface="Pretendard Medium" panose="02000603000000020004" pitchFamily="2" charset="-127"/>
-                <a:ea typeface="Pretendard Medium" panose="02000603000000020004" pitchFamily="2" charset="-127"/>
+                <a:latin typeface="페이퍼로지 5 Medium" pitchFamily="2" charset="-127"/>
+                <a:ea typeface="페이퍼로지 5 Medium" pitchFamily="2" charset="-127"/>
                 <a:cs typeface="Pretendard Medium" panose="02000603000000020004" pitchFamily="2" charset="-127"/>
               </a:rPr>
               <a:t>{{메인제목}}</a:t>
             </a:r>
             <a:endParaRPr lang="en-US" sz="2475" dirty="0">
-              <a:latin typeface="Pretendard Medium" panose="02000603000000020004" pitchFamily="2" charset="-127"/>
-              <a:ea typeface="Pretendard Medium" panose="02000603000000020004" pitchFamily="2" charset="-127"/>
+              <a:latin typeface="페이퍼로지 5 Medium" pitchFamily="2" charset="-127"/>
+              <a:ea typeface="페이퍼로지 5 Medium" pitchFamily="2" charset="-127"/>
               <a:cs typeface="Pretendard Medium" panose="02000603000000020004" pitchFamily="2" charset="-127"/>
             </a:endParaRPr>
           </a:p>
@@ -1006,7 +1024,13 @@
         </p:spPr>
         <p:txBody>
           <a:bodyPr/>
-          <a:p/>
+          <a:lstStyle/>
+          <a:p>
+            <a:endParaRPr>
+              <a:latin typeface="페이퍼로지 5 Medium" pitchFamily="2" charset="-127"/>
+              <a:ea typeface="페이퍼로지 5 Medium" pitchFamily="2" charset="-127"/>
+            </a:endParaRPr>
+          </a:p>
         </p:txBody>
       </p:sp>
       <p:sp>
@@ -1034,7 +1058,13 @@
         </p:spPr>
         <p:txBody>
           <a:bodyPr/>
-          <a:p/>
+          <a:lstStyle/>
+          <a:p>
+            <a:endParaRPr>
+              <a:latin typeface="페이퍼로지 5 Medium" pitchFamily="2" charset="-127"/>
+              <a:ea typeface="페이퍼로지 5 Medium" pitchFamily="2" charset="-127"/>
+            </a:endParaRPr>
+          </a:p>
         </p:txBody>
       </p:sp>
       <p:sp>
@@ -1071,15 +1101,15 @@
                 <a:solidFill>
                   <a:srgbClr val="FFFFFF"/>
                 </a:solidFill>
-                <a:latin typeface="Pretendard Medium" panose="02000603000000020004" pitchFamily="2" charset="-127"/>
-                <a:ea typeface="Pretendard Medium" panose="02000603000000020004" pitchFamily="2" charset="-127"/>
+                <a:latin typeface="페이퍼로지 5 Medium" pitchFamily="2" charset="-127"/>
+                <a:ea typeface="페이퍼로지 5 Medium" pitchFamily="2" charset="-127"/>
                 <a:cs typeface="Pretendard Medium" panose="02000603000000020004" pitchFamily="2" charset="-127"/>
               </a:rPr>
               <a:t>{{과목}}</a:t>
             </a:r>
             <a:endParaRPr lang="en-US" sz="900" dirty="0">
-              <a:latin typeface="Pretendard Medium" panose="02000603000000020004" pitchFamily="2" charset="-127"/>
-              <a:ea typeface="Pretendard Medium" panose="02000603000000020004" pitchFamily="2" charset="-127"/>
+              <a:latin typeface="페이퍼로지 5 Medium" pitchFamily="2" charset="-127"/>
+              <a:ea typeface="페이퍼로지 5 Medium" pitchFamily="2" charset="-127"/>
               <a:cs typeface="Pretendard Medium" panose="02000603000000020004" pitchFamily="2" charset="-127"/>
             </a:endParaRPr>
           </a:p>
@@ -1110,7 +1140,13 @@
         </p:spPr>
         <p:txBody>
           <a:bodyPr/>
-          <a:p/>
+          <a:lstStyle/>
+          <a:p>
+            <a:endParaRPr>
+              <a:latin typeface="페이퍼로지 5 Medium" pitchFamily="2" charset="-127"/>
+              <a:ea typeface="페이퍼로지 5 Medium" pitchFamily="2" charset="-127"/>
+            </a:endParaRPr>
+          </a:p>
         </p:txBody>
       </p:sp>
       <p:sp>
@@ -1132,7 +1168,7 @@
         </p:spPr>
         <p:txBody>
           <a:bodyPr wrap="square" lIns="25400" tIns="25400" rIns="25400" bIns="25400" rtlCol="0" anchor="t">
-            <a:normAutofit fontScale="92500" lnSpcReduction="20000"/>
+            <a:normAutofit fontScale="77500" lnSpcReduction="20000"/>
           </a:bodyPr>
           <a:lstStyle/>
           <a:p>
@@ -1147,15 +1183,15 @@
                 <a:solidFill>
                   <a:srgbClr val="FFFFFF"/>
                 </a:solidFill>
-                <a:latin typeface="Pretendard Medium" panose="02000603000000020004" pitchFamily="2" charset="-127"/>
-                <a:ea typeface="Pretendard Medium" panose="02000603000000020004" pitchFamily="2" charset="-127"/>
+                <a:latin typeface="페이퍼로지 5 Medium" pitchFamily="2" charset="-127"/>
+                <a:ea typeface="페이퍼로지 5 Medium" pitchFamily="2" charset="-127"/>
                 <a:cs typeface="Pretendard Medium" panose="02000603000000020004" pitchFamily="2" charset="-127"/>
               </a:rPr>
               <a:t>{{강사명}}</a:t>
             </a:r>
             <a:endParaRPr lang="en-US" sz="900" dirty="0">
-              <a:latin typeface="Pretendard Medium" panose="02000603000000020004" pitchFamily="2" charset="-127"/>
-              <a:ea typeface="Pretendard Medium" panose="02000603000000020004" pitchFamily="2" charset="-127"/>
+              <a:latin typeface="페이퍼로지 5 Medium" pitchFamily="2" charset="-127"/>
+              <a:ea typeface="페이퍼로지 5 Medium" pitchFamily="2" charset="-127"/>
               <a:cs typeface="Pretendard Medium" panose="02000603000000020004" pitchFamily="2" charset="-127"/>
             </a:endParaRPr>
           </a:p>
@@ -1182,7 +1218,13 @@
         </p:spPr>
         <p:txBody>
           <a:bodyPr/>
-          <a:p/>
+          <a:lstStyle/>
+          <a:p>
+            <a:endParaRPr>
+              <a:latin typeface="페이퍼로지 5 Medium" pitchFamily="2" charset="-127"/>
+              <a:ea typeface="페이퍼로지 5 Medium" pitchFamily="2" charset="-127"/>
+            </a:endParaRPr>
+          </a:p>
         </p:txBody>
       </p:sp>
       <p:sp>
@@ -1208,7 +1250,13 @@
         </p:spPr>
         <p:txBody>
           <a:bodyPr/>
-          <a:p/>
+          <a:lstStyle/>
+          <a:p>
+            <a:endParaRPr>
+              <a:latin typeface="페이퍼로지 5 Medium" pitchFamily="2" charset="-127"/>
+              <a:ea typeface="페이퍼로지 5 Medium" pitchFamily="2" charset="-127"/>
+            </a:endParaRPr>
+          </a:p>
         </p:txBody>
       </p:sp>
       <p:sp>
@@ -1242,15 +1290,15 @@
                 <a:solidFill>
                   <a:srgbClr val="161616"/>
                 </a:solidFill>
-                <a:latin typeface="Pretendard Medium" panose="02000603000000020004" pitchFamily="2" charset="-127"/>
-                <a:ea typeface="Pretendard Medium" panose="02000603000000020004" pitchFamily="2" charset="-127"/>
+                <a:latin typeface="페이퍼로지 5 Medium" pitchFamily="2" charset="-127"/>
+                <a:ea typeface="페이퍼로지 5 Medium" pitchFamily="2" charset="-127"/>
                 <a:cs typeface="Pretendard Medium" panose="02000603000000020004" pitchFamily="2" charset="-127"/>
               </a:rPr>
               <a:t>강의개요</a:t>
             </a:r>
             <a:endParaRPr lang="en-US" sz="1200" dirty="0">
-              <a:latin typeface="Pretendard Medium" panose="02000603000000020004" pitchFamily="2" charset="-127"/>
-              <a:ea typeface="Pretendard Medium" panose="02000603000000020004" pitchFamily="2" charset="-127"/>
+              <a:latin typeface="페이퍼로지 5 Medium" pitchFamily="2" charset="-127"/>
+              <a:ea typeface="페이퍼로지 5 Medium" pitchFamily="2" charset="-127"/>
               <a:cs typeface="Pretendard Medium" panose="02000603000000020004" pitchFamily="2" charset="-127"/>
             </a:endParaRPr>
           </a:p>
@@ -1282,7 +1330,13 @@
         </p:spPr>
         <p:txBody>
           <a:bodyPr/>
-          <a:p/>
+          <a:lstStyle/>
+          <a:p>
+            <a:endParaRPr>
+              <a:latin typeface="페이퍼로지 5 Medium" pitchFamily="2" charset="-127"/>
+              <a:ea typeface="페이퍼로지 5 Medium" pitchFamily="2" charset="-127"/>
+            </a:endParaRPr>
+          </a:p>
         </p:txBody>
       </p:sp>
       <p:sp>
@@ -1304,7 +1358,7 @@
         </p:spPr>
         <p:txBody>
           <a:bodyPr wrap="none" lIns="25400" tIns="25400" rIns="25400" bIns="25400" rtlCol="0" anchor="ctr">
-            <a:normAutofit lnSpcReduction="10000"/>
+            <a:normAutofit fontScale="92500" lnSpcReduction="10000"/>
           </a:bodyPr>
           <a:lstStyle/>
           <a:p>
@@ -1317,15 +1371,15 @@
                 <a:solidFill>
                   <a:srgbClr val="3A3A3A"/>
                 </a:solidFill>
-                <a:latin typeface="Pretendard Medium" panose="02000603000000020004" pitchFamily="2" charset="-127"/>
-                <a:ea typeface="Pretendard Medium" panose="02000603000000020004" pitchFamily="2" charset="-127"/>
+                <a:latin typeface="페이퍼로지 5 Medium" pitchFamily="2" charset="-127"/>
+                <a:ea typeface="페이퍼로지 5 Medium" pitchFamily="2" charset="-127"/>
                 <a:cs typeface="Pretendard Medium" panose="02000603000000020004" pitchFamily="2" charset="-127"/>
               </a:rPr>
               <a:t>개강일</a:t>
             </a:r>
             <a:endParaRPr lang="en-US" sz="900" dirty="0">
-              <a:latin typeface="Pretendard Medium" panose="02000603000000020004" pitchFamily="2" charset="-127"/>
-              <a:ea typeface="Pretendard Medium" panose="02000603000000020004" pitchFamily="2" charset="-127"/>
+              <a:latin typeface="페이퍼로지 5 Medium" pitchFamily="2" charset="-127"/>
+              <a:ea typeface="페이퍼로지 5 Medium" pitchFamily="2" charset="-127"/>
               <a:cs typeface="Pretendard Medium" panose="02000603000000020004" pitchFamily="2" charset="-127"/>
             </a:endParaRPr>
           </a:p>
@@ -1357,7 +1411,13 @@
         </p:spPr>
         <p:txBody>
           <a:bodyPr/>
-          <a:p/>
+          <a:lstStyle/>
+          <a:p>
+            <a:endParaRPr>
+              <a:latin typeface="페이퍼로지 5 Medium" pitchFamily="2" charset="-127"/>
+              <a:ea typeface="페이퍼로지 5 Medium" pitchFamily="2" charset="-127"/>
+            </a:endParaRPr>
+          </a:p>
         </p:txBody>
       </p:sp>
       <p:sp>
@@ -1379,7 +1439,7 @@
         </p:spPr>
         <p:txBody>
           <a:bodyPr wrap="square" lIns="25400" tIns="25400" rIns="25400" bIns="25400" rtlCol="0" anchor="ctr">
-            <a:normAutofit lnSpcReduction="10000"/>
+            <a:normAutofit fontScale="92500" lnSpcReduction="10000"/>
           </a:bodyPr>
           <a:lstStyle/>
           <a:p>
@@ -1392,15 +1452,15 @@
                 <a:solidFill>
                   <a:srgbClr val="2B2B2B"/>
                 </a:solidFill>
-                <a:latin typeface="Pretendard Medium" panose="02000603000000020004" pitchFamily="2" charset="-127"/>
-                <a:ea typeface="Pretendard Medium" panose="02000603000000020004" pitchFamily="2" charset="-127"/>
+                <a:latin typeface="페이퍼로지 5 Medium" pitchFamily="2" charset="-127"/>
+                <a:ea typeface="페이퍼로지 5 Medium" pitchFamily="2" charset="-127"/>
                 <a:cs typeface="Pretendard Medium" panose="02000603000000020004" pitchFamily="2" charset="-127"/>
               </a:rPr>
               <a:t>{{개강일}}</a:t>
             </a:r>
             <a:endParaRPr lang="en-US" sz="900" dirty="0">
-              <a:latin typeface="Pretendard Medium" panose="02000603000000020004" pitchFamily="2" charset="-127"/>
-              <a:ea typeface="Pretendard Medium" panose="02000603000000020004" pitchFamily="2" charset="-127"/>
+              <a:latin typeface="페이퍼로지 5 Medium" pitchFamily="2" charset="-127"/>
+              <a:ea typeface="페이퍼로지 5 Medium" pitchFamily="2" charset="-127"/>
               <a:cs typeface="Pretendard Medium" panose="02000603000000020004" pitchFamily="2" charset="-127"/>
             </a:endParaRPr>
           </a:p>
@@ -1432,7 +1492,13 @@
         </p:spPr>
         <p:txBody>
           <a:bodyPr/>
-          <a:p/>
+          <a:lstStyle/>
+          <a:p>
+            <a:endParaRPr>
+              <a:latin typeface="페이퍼로지 5 Medium" pitchFamily="2" charset="-127"/>
+              <a:ea typeface="페이퍼로지 5 Medium" pitchFamily="2" charset="-127"/>
+            </a:endParaRPr>
+          </a:p>
         </p:txBody>
       </p:sp>
       <p:sp>
@@ -1454,7 +1520,7 @@
         </p:spPr>
         <p:txBody>
           <a:bodyPr wrap="none" lIns="25400" tIns="25400" rIns="25400" bIns="25400" rtlCol="0" anchor="ctr">
-            <a:normAutofit lnSpcReduction="10000"/>
+            <a:normAutofit fontScale="92500" lnSpcReduction="10000"/>
           </a:bodyPr>
           <a:lstStyle/>
           <a:p>
@@ -1467,15 +1533,15 @@
                 <a:solidFill>
                   <a:srgbClr val="3A3A3A"/>
                 </a:solidFill>
-                <a:latin typeface="Pretendard Medium" panose="02000603000000020004" pitchFamily="2" charset="-127"/>
-                <a:ea typeface="Pretendard Medium" panose="02000603000000020004" pitchFamily="2" charset="-127"/>
+                <a:latin typeface="페이퍼로지 5 Medium" pitchFamily="2" charset="-127"/>
+                <a:ea typeface="페이퍼로지 5 Medium" pitchFamily="2" charset="-127"/>
                 <a:cs typeface="Pretendard Medium" panose="02000603000000020004" pitchFamily="2" charset="-127"/>
               </a:rPr>
               <a:t>수업 시간</a:t>
             </a:r>
             <a:endParaRPr lang="en-US" sz="900" dirty="0">
-              <a:latin typeface="Pretendard Medium" panose="02000603000000020004" pitchFamily="2" charset="-127"/>
-              <a:ea typeface="Pretendard Medium" panose="02000603000000020004" pitchFamily="2" charset="-127"/>
+              <a:latin typeface="페이퍼로지 5 Medium" pitchFamily="2" charset="-127"/>
+              <a:ea typeface="페이퍼로지 5 Medium" pitchFamily="2" charset="-127"/>
               <a:cs typeface="Pretendard Medium" panose="02000603000000020004" pitchFamily="2" charset="-127"/>
             </a:endParaRPr>
           </a:p>
@@ -1507,7 +1573,13 @@
         </p:spPr>
         <p:txBody>
           <a:bodyPr/>
-          <a:p/>
+          <a:lstStyle/>
+          <a:p>
+            <a:endParaRPr>
+              <a:latin typeface="페이퍼로지 5 Medium" pitchFamily="2" charset="-127"/>
+              <a:ea typeface="페이퍼로지 5 Medium" pitchFamily="2" charset="-127"/>
+            </a:endParaRPr>
+          </a:p>
         </p:txBody>
       </p:sp>
       <p:sp>
@@ -1529,7 +1601,7 @@
         </p:spPr>
         <p:txBody>
           <a:bodyPr wrap="square" lIns="25400" tIns="25400" rIns="25400" bIns="25400" rtlCol="0" anchor="ctr">
-            <a:normAutofit lnSpcReduction="10000"/>
+            <a:normAutofit fontScale="92500" lnSpcReduction="10000"/>
           </a:bodyPr>
           <a:lstStyle/>
           <a:p>
@@ -1542,15 +1614,15 @@
                 <a:solidFill>
                   <a:srgbClr val="2B2B2B"/>
                 </a:solidFill>
-                <a:latin typeface="Pretendard Medium" panose="02000603000000020004" pitchFamily="2" charset="-127"/>
-                <a:ea typeface="Pretendard Medium" panose="02000603000000020004" pitchFamily="2" charset="-127"/>
+                <a:latin typeface="페이퍼로지 5 Medium" pitchFamily="2" charset="-127"/>
+                <a:ea typeface="페이퍼로지 5 Medium" pitchFamily="2" charset="-127"/>
                 <a:cs typeface="Pretendard Medium" panose="02000603000000020004" pitchFamily="2" charset="-127"/>
               </a:rPr>
               <a:t>{{수업시간}}</a:t>
             </a:r>
             <a:endParaRPr lang="en-US" sz="900" dirty="0">
-              <a:latin typeface="Pretendard Medium" panose="02000603000000020004" pitchFamily="2" charset="-127"/>
-              <a:ea typeface="Pretendard Medium" panose="02000603000000020004" pitchFamily="2" charset="-127"/>
+              <a:latin typeface="페이퍼로지 5 Medium" pitchFamily="2" charset="-127"/>
+              <a:ea typeface="페이퍼로지 5 Medium" pitchFamily="2" charset="-127"/>
               <a:cs typeface="Pretendard Medium" panose="02000603000000020004" pitchFamily="2" charset="-127"/>
             </a:endParaRPr>
           </a:p>
@@ -1582,7 +1654,13 @@
         </p:spPr>
         <p:txBody>
           <a:bodyPr/>
-          <a:p/>
+          <a:lstStyle/>
+          <a:p>
+            <a:endParaRPr>
+              <a:latin typeface="페이퍼로지 5 Medium" pitchFamily="2" charset="-127"/>
+              <a:ea typeface="페이퍼로지 5 Medium" pitchFamily="2" charset="-127"/>
+            </a:endParaRPr>
+          </a:p>
         </p:txBody>
       </p:sp>
       <p:sp>
@@ -1604,7 +1682,7 @@
         </p:spPr>
         <p:txBody>
           <a:bodyPr wrap="none" lIns="25400" tIns="25400" rIns="25400" bIns="25400" rtlCol="0" anchor="ctr">
-            <a:normAutofit lnSpcReduction="10000"/>
+            <a:normAutofit fontScale="92500" lnSpcReduction="10000"/>
           </a:bodyPr>
           <a:lstStyle/>
           <a:p>
@@ -1617,15 +1695,15 @@
                 <a:solidFill>
                   <a:srgbClr val="3A3A3A"/>
                 </a:solidFill>
-                <a:latin typeface="Pretendard Medium" panose="02000603000000020004" pitchFamily="2" charset="-127"/>
-                <a:ea typeface="Pretendard Medium" panose="02000603000000020004" pitchFamily="2" charset="-127"/>
+                <a:latin typeface="페이퍼로지 5 Medium" pitchFamily="2" charset="-127"/>
+                <a:ea typeface="페이퍼로지 5 Medium" pitchFamily="2" charset="-127"/>
                 <a:cs typeface="Pretendard Medium" panose="02000603000000020004" pitchFamily="2" charset="-127"/>
               </a:rPr>
               <a:t>수강 기간</a:t>
             </a:r>
             <a:endParaRPr lang="en-US" sz="900" dirty="0">
-              <a:latin typeface="Pretendard Medium" panose="02000603000000020004" pitchFamily="2" charset="-127"/>
-              <a:ea typeface="Pretendard Medium" panose="02000603000000020004" pitchFamily="2" charset="-127"/>
+              <a:latin typeface="페이퍼로지 5 Medium" pitchFamily="2" charset="-127"/>
+              <a:ea typeface="페이퍼로지 5 Medium" pitchFamily="2" charset="-127"/>
               <a:cs typeface="Pretendard Medium" panose="02000603000000020004" pitchFamily="2" charset="-127"/>
             </a:endParaRPr>
           </a:p>
@@ -1657,7 +1735,13 @@
         </p:spPr>
         <p:txBody>
           <a:bodyPr/>
-          <a:p/>
+          <a:lstStyle/>
+          <a:p>
+            <a:endParaRPr>
+              <a:latin typeface="페이퍼로지 5 Medium" pitchFamily="2" charset="-127"/>
+              <a:ea typeface="페이퍼로지 5 Medium" pitchFamily="2" charset="-127"/>
+            </a:endParaRPr>
+          </a:p>
         </p:txBody>
       </p:sp>
       <p:sp>
@@ -1679,7 +1763,7 @@
         </p:spPr>
         <p:txBody>
           <a:bodyPr wrap="square" lIns="25400" tIns="25400" rIns="25400" bIns="25400" rtlCol="0" anchor="ctr">
-            <a:normAutofit lnSpcReduction="10000"/>
+            <a:normAutofit fontScale="92500" lnSpcReduction="10000"/>
           </a:bodyPr>
           <a:lstStyle/>
           <a:p>
@@ -1692,15 +1776,15 @@
                 <a:solidFill>
                   <a:srgbClr val="2B2B2B"/>
                 </a:solidFill>
-                <a:latin typeface="Pretendard Medium" panose="02000603000000020004" pitchFamily="2" charset="-127"/>
-                <a:ea typeface="Pretendard Medium" panose="02000603000000020004" pitchFamily="2" charset="-127"/>
+                <a:latin typeface="페이퍼로지 5 Medium" pitchFamily="2" charset="-127"/>
+                <a:ea typeface="페이퍼로지 5 Medium" pitchFamily="2" charset="-127"/>
                 <a:cs typeface="Pretendard Medium" panose="02000603000000020004" pitchFamily="2" charset="-127"/>
               </a:rPr>
               <a:t>{{수강기간}}</a:t>
             </a:r>
             <a:endParaRPr lang="en-US" sz="900" dirty="0">
-              <a:latin typeface="Pretendard Medium" panose="02000603000000020004" pitchFamily="2" charset="-127"/>
-              <a:ea typeface="Pretendard Medium" panose="02000603000000020004" pitchFamily="2" charset="-127"/>
+              <a:latin typeface="페이퍼로지 5 Medium" pitchFamily="2" charset="-127"/>
+              <a:ea typeface="페이퍼로지 5 Medium" pitchFamily="2" charset="-127"/>
               <a:cs typeface="Pretendard Medium" panose="02000603000000020004" pitchFamily="2" charset="-127"/>
             </a:endParaRPr>
           </a:p>
@@ -1732,7 +1816,13 @@
         </p:spPr>
         <p:txBody>
           <a:bodyPr/>
-          <a:p/>
+          <a:lstStyle/>
+          <a:p>
+            <a:endParaRPr>
+              <a:latin typeface="페이퍼로지 5 Medium" pitchFamily="2" charset="-127"/>
+              <a:ea typeface="페이퍼로지 5 Medium" pitchFamily="2" charset="-127"/>
+            </a:endParaRPr>
+          </a:p>
         </p:txBody>
       </p:sp>
       <p:sp>
@@ -1754,7 +1844,7 @@
         </p:spPr>
         <p:txBody>
           <a:bodyPr wrap="none" lIns="25400" tIns="25400" rIns="25400" bIns="25400" rtlCol="0" anchor="ctr">
-            <a:normAutofit lnSpcReduction="10000"/>
+            <a:normAutofit fontScale="92500" lnSpcReduction="10000"/>
           </a:bodyPr>
           <a:lstStyle/>
           <a:p>
@@ -1767,15 +1857,15 @@
                 <a:solidFill>
                   <a:srgbClr val="3A3A3A"/>
                 </a:solidFill>
-                <a:latin typeface="Pretendard Medium" panose="02000603000000020004" pitchFamily="2" charset="-127"/>
-                <a:ea typeface="Pretendard Medium" panose="02000603000000020004" pitchFamily="2" charset="-127"/>
+                <a:latin typeface="페이퍼로지 5 Medium" pitchFamily="2" charset="-127"/>
+                <a:ea typeface="페이퍼로지 5 Medium" pitchFamily="2" charset="-127"/>
                 <a:cs typeface="Pretendard Medium" panose="02000603000000020004" pitchFamily="2" charset="-127"/>
               </a:rPr>
               <a:t>보강 방법</a:t>
             </a:r>
             <a:endParaRPr lang="en-US" sz="900" dirty="0">
-              <a:latin typeface="Pretendard Medium" panose="02000603000000020004" pitchFamily="2" charset="-127"/>
-              <a:ea typeface="Pretendard Medium" panose="02000603000000020004" pitchFamily="2" charset="-127"/>
+              <a:latin typeface="페이퍼로지 5 Medium" pitchFamily="2" charset="-127"/>
+              <a:ea typeface="페이퍼로지 5 Medium" pitchFamily="2" charset="-127"/>
               <a:cs typeface="Pretendard Medium" panose="02000603000000020004" pitchFamily="2" charset="-127"/>
             </a:endParaRPr>
           </a:p>
@@ -1807,7 +1897,13 @@
         </p:spPr>
         <p:txBody>
           <a:bodyPr/>
-          <a:p/>
+          <a:lstStyle/>
+          <a:p>
+            <a:endParaRPr>
+              <a:latin typeface="페이퍼로지 5 Medium" pitchFamily="2" charset="-127"/>
+              <a:ea typeface="페이퍼로지 5 Medium" pitchFamily="2" charset="-127"/>
+            </a:endParaRPr>
+          </a:p>
         </p:txBody>
       </p:sp>
       <p:sp>
@@ -1829,7 +1925,7 @@
         </p:spPr>
         <p:txBody>
           <a:bodyPr wrap="square" lIns="25400" tIns="25400" rIns="25400" bIns="25400" rtlCol="0" anchor="ctr">
-            <a:normAutofit lnSpcReduction="10000"/>
+            <a:normAutofit fontScale="92500" lnSpcReduction="10000"/>
           </a:bodyPr>
           <a:lstStyle/>
           <a:p>
@@ -1842,15 +1938,15 @@
                 <a:solidFill>
                   <a:srgbClr val="2B2B2B"/>
                 </a:solidFill>
-                <a:latin typeface="Pretendard Medium" panose="02000603000000020004" pitchFamily="2" charset="-127"/>
-                <a:ea typeface="Pretendard Medium" panose="02000603000000020004" pitchFamily="2" charset="-127"/>
+                <a:latin typeface="페이퍼로지 5 Medium" pitchFamily="2" charset="-127"/>
+                <a:ea typeface="페이퍼로지 5 Medium" pitchFamily="2" charset="-127"/>
                 <a:cs typeface="Pretendard Medium" panose="02000603000000020004" pitchFamily="2" charset="-127"/>
               </a:rPr>
               <a:t>{{보강방법}}</a:t>
             </a:r>
             <a:endParaRPr lang="en-US" sz="900" dirty="0">
-              <a:latin typeface="Pretendard Medium" panose="02000603000000020004" pitchFamily="2" charset="-127"/>
-              <a:ea typeface="Pretendard Medium" panose="02000603000000020004" pitchFamily="2" charset="-127"/>
+              <a:latin typeface="페이퍼로지 5 Medium" pitchFamily="2" charset="-127"/>
+              <a:ea typeface="페이퍼로지 5 Medium" pitchFamily="2" charset="-127"/>
               <a:cs typeface="Pretendard Medium" panose="02000603000000020004" pitchFamily="2" charset="-127"/>
             </a:endParaRPr>
           </a:p>
@@ -1882,7 +1978,13 @@
         </p:spPr>
         <p:txBody>
           <a:bodyPr/>
-          <a:p/>
+          <a:lstStyle/>
+          <a:p>
+            <a:endParaRPr>
+              <a:latin typeface="페이퍼로지 5 Medium" pitchFamily="2" charset="-127"/>
+              <a:ea typeface="페이퍼로지 5 Medium" pitchFamily="2" charset="-127"/>
+            </a:endParaRPr>
+          </a:p>
         </p:txBody>
       </p:sp>
       <p:sp>
@@ -1904,7 +2006,7 @@
         </p:spPr>
         <p:txBody>
           <a:bodyPr wrap="none" lIns="25400" tIns="25400" rIns="25400" bIns="25400" rtlCol="0" anchor="ctr">
-            <a:normAutofit lnSpcReduction="10000"/>
+            <a:normAutofit fontScale="92500" lnSpcReduction="10000"/>
           </a:bodyPr>
           <a:lstStyle/>
           <a:p>
@@ -1917,15 +2019,15 @@
                 <a:solidFill>
                   <a:srgbClr val="3A3A3A"/>
                 </a:solidFill>
-                <a:latin typeface="Pretendard Medium" panose="02000603000000020004" pitchFamily="2" charset="-127"/>
-                <a:ea typeface="Pretendard Medium" panose="02000603000000020004" pitchFamily="2" charset="-127"/>
+                <a:latin typeface="페이퍼로지 5 Medium" pitchFamily="2" charset="-127"/>
+                <a:ea typeface="페이퍼로지 5 Medium" pitchFamily="2" charset="-127"/>
                 <a:cs typeface="Pretendard Medium" panose="02000603000000020004" pitchFamily="2" charset="-127"/>
               </a:rPr>
               <a:t>수강료</a:t>
             </a:r>
             <a:endParaRPr lang="en-US" sz="900" dirty="0">
-              <a:latin typeface="Pretendard Medium" panose="02000603000000020004" pitchFamily="2" charset="-127"/>
-              <a:ea typeface="Pretendard Medium" panose="02000603000000020004" pitchFamily="2" charset="-127"/>
+              <a:latin typeface="페이퍼로지 5 Medium" pitchFamily="2" charset="-127"/>
+              <a:ea typeface="페이퍼로지 5 Medium" pitchFamily="2" charset="-127"/>
               <a:cs typeface="Pretendard Medium" panose="02000603000000020004" pitchFamily="2" charset="-127"/>
             </a:endParaRPr>
           </a:p>
@@ -1957,7 +2059,13 @@
         </p:spPr>
         <p:txBody>
           <a:bodyPr/>
-          <a:p/>
+          <a:lstStyle/>
+          <a:p>
+            <a:endParaRPr>
+              <a:latin typeface="페이퍼로지 5 Medium" pitchFamily="2" charset="-127"/>
+              <a:ea typeface="페이퍼로지 5 Medium" pitchFamily="2" charset="-127"/>
+            </a:endParaRPr>
+          </a:p>
         </p:txBody>
       </p:sp>
       <p:sp>
@@ -1979,7 +2087,7 @@
         </p:spPr>
         <p:txBody>
           <a:bodyPr wrap="square" lIns="25400" tIns="25400" rIns="25400" bIns="25400" rtlCol="0" anchor="ctr">
-            <a:normAutofit lnSpcReduction="10000"/>
+            <a:normAutofit fontScale="92500" lnSpcReduction="10000"/>
           </a:bodyPr>
           <a:lstStyle/>
           <a:p>
@@ -1992,15 +2100,15 @@
                 <a:solidFill>
                   <a:srgbClr val="2B2B2B"/>
                 </a:solidFill>
-                <a:latin typeface="Pretendard Medium" panose="02000603000000020004" pitchFamily="2" charset="-127"/>
-                <a:ea typeface="Pretendard Medium" panose="02000603000000020004" pitchFamily="2" charset="-127"/>
+                <a:latin typeface="페이퍼로지 5 Medium" pitchFamily="2" charset="-127"/>
+                <a:ea typeface="페이퍼로지 5 Medium" pitchFamily="2" charset="-127"/>
                 <a:cs typeface="Pretendard Medium" panose="02000603000000020004" pitchFamily="2" charset="-127"/>
               </a:rPr>
               <a:t>{{수강료}}</a:t>
             </a:r>
             <a:endParaRPr lang="en-US" sz="900" dirty="0">
-              <a:latin typeface="Pretendard Medium" panose="02000603000000020004" pitchFamily="2" charset="-127"/>
-              <a:ea typeface="Pretendard Medium" panose="02000603000000020004" pitchFamily="2" charset="-127"/>
+              <a:latin typeface="페이퍼로지 5 Medium" pitchFamily="2" charset="-127"/>
+              <a:ea typeface="페이퍼로지 5 Medium" pitchFamily="2" charset="-127"/>
               <a:cs typeface="Pretendard Medium" panose="02000603000000020004" pitchFamily="2" charset="-127"/>
             </a:endParaRPr>
           </a:p>
@@ -2032,7 +2140,13 @@
         </p:spPr>
         <p:txBody>
           <a:bodyPr/>
-          <a:p/>
+          <a:lstStyle/>
+          <a:p>
+            <a:endParaRPr>
+              <a:latin typeface="페이퍼로지 5 Medium" pitchFamily="2" charset="-127"/>
+              <a:ea typeface="페이퍼로지 5 Medium" pitchFamily="2" charset="-127"/>
+            </a:endParaRPr>
+          </a:p>
         </p:txBody>
       </p:sp>
       <p:sp>
@@ -2054,7 +2168,7 @@
         </p:spPr>
         <p:txBody>
           <a:bodyPr wrap="none" lIns="25400" tIns="25400" rIns="25400" bIns="25400" rtlCol="0" anchor="ctr">
-            <a:normAutofit lnSpcReduction="10000"/>
+            <a:normAutofit fontScale="92500" lnSpcReduction="10000"/>
           </a:bodyPr>
           <a:lstStyle/>
           <a:p>
@@ -2067,15 +2181,15 @@
                 <a:solidFill>
                   <a:srgbClr val="3A3A3A"/>
                 </a:solidFill>
-                <a:latin typeface="Pretendard Medium" panose="02000603000000020004" pitchFamily="2" charset="-127"/>
-                <a:ea typeface="Pretendard Medium" panose="02000603000000020004" pitchFamily="2" charset="-127"/>
+                <a:latin typeface="페이퍼로지 5 Medium" pitchFamily="2" charset="-127"/>
+                <a:ea typeface="페이퍼로지 5 Medium" pitchFamily="2" charset="-127"/>
                 <a:cs typeface="Pretendard Medium" panose="02000603000000020004" pitchFamily="2" charset="-127"/>
               </a:rPr>
               <a:t>교재 정보</a:t>
             </a:r>
             <a:endParaRPr lang="en-US" sz="900" dirty="0">
-              <a:latin typeface="Pretendard Medium" panose="02000603000000020004" pitchFamily="2" charset="-127"/>
-              <a:ea typeface="Pretendard Medium" panose="02000603000000020004" pitchFamily="2" charset="-127"/>
+              <a:latin typeface="페이퍼로지 5 Medium" pitchFamily="2" charset="-127"/>
+              <a:ea typeface="페이퍼로지 5 Medium" pitchFamily="2" charset="-127"/>
               <a:cs typeface="Pretendard Medium" panose="02000603000000020004" pitchFamily="2" charset="-127"/>
             </a:endParaRPr>
           </a:p>
@@ -2107,7 +2221,13 @@
         </p:spPr>
         <p:txBody>
           <a:bodyPr/>
-          <a:p/>
+          <a:lstStyle/>
+          <a:p>
+            <a:endParaRPr>
+              <a:latin typeface="페이퍼로지 5 Medium" pitchFamily="2" charset="-127"/>
+              <a:ea typeface="페이퍼로지 5 Medium" pitchFamily="2" charset="-127"/>
+            </a:endParaRPr>
+          </a:p>
         </p:txBody>
       </p:sp>
       <p:sp>
@@ -2129,7 +2249,7 @@
         </p:spPr>
         <p:txBody>
           <a:bodyPr wrap="square" lIns="25400" tIns="25400" rIns="25400" bIns="25400" rtlCol="0" anchor="ctr">
-            <a:normAutofit lnSpcReduction="10000"/>
+            <a:normAutofit fontScale="92500" lnSpcReduction="10000"/>
           </a:bodyPr>
           <a:lstStyle/>
           <a:p>
@@ -2142,15 +2262,15 @@
                 <a:solidFill>
                   <a:srgbClr val="2B2B2B"/>
                 </a:solidFill>
-                <a:latin typeface="Pretendard Medium" panose="02000603000000020004" pitchFamily="2" charset="-127"/>
-                <a:ea typeface="Pretendard Medium" panose="02000603000000020004" pitchFamily="2" charset="-127"/>
+                <a:latin typeface="페이퍼로지 5 Medium" pitchFamily="2" charset="-127"/>
+                <a:ea typeface="페이퍼로지 5 Medium" pitchFamily="2" charset="-127"/>
                 <a:cs typeface="Pretendard Medium" panose="02000603000000020004" pitchFamily="2" charset="-127"/>
               </a:rPr>
               <a:t>{{교재정보}}</a:t>
             </a:r>
             <a:endParaRPr lang="en-US" sz="900" dirty="0">
-              <a:latin typeface="Pretendard Medium" panose="02000603000000020004" pitchFamily="2" charset="-127"/>
-              <a:ea typeface="Pretendard Medium" panose="02000603000000020004" pitchFamily="2" charset="-127"/>
+              <a:latin typeface="페이퍼로지 5 Medium" pitchFamily="2" charset="-127"/>
+              <a:ea typeface="페이퍼로지 5 Medium" pitchFamily="2" charset="-127"/>
               <a:cs typeface="Pretendard Medium" panose="02000603000000020004" pitchFamily="2" charset="-127"/>
             </a:endParaRPr>
           </a:p>
@@ -2179,7 +2299,13 @@
         </p:spPr>
         <p:txBody>
           <a:bodyPr/>
-          <a:p/>
+          <a:lstStyle/>
+          <a:p>
+            <a:endParaRPr>
+              <a:latin typeface="페이퍼로지 5 Medium" pitchFamily="2" charset="-127"/>
+              <a:ea typeface="페이퍼로지 5 Medium" pitchFamily="2" charset="-127"/>
+            </a:endParaRPr>
+          </a:p>
         </p:txBody>
       </p:sp>
       <p:sp>
@@ -2213,15 +2339,15 @@
                 <a:solidFill>
                   <a:srgbClr val="161616"/>
                 </a:solidFill>
-                <a:latin typeface="Pretendard Medium" panose="02000603000000020004" pitchFamily="2" charset="-127"/>
-                <a:ea typeface="Pretendard Medium" panose="02000603000000020004" pitchFamily="2" charset="-127"/>
+                <a:latin typeface="페이퍼로지 5 Medium" pitchFamily="2" charset="-127"/>
+                <a:ea typeface="페이퍼로지 5 Medium" pitchFamily="2" charset="-127"/>
                 <a:cs typeface="Pretendard Medium" panose="02000603000000020004" pitchFamily="2" charset="-127"/>
               </a:rPr>
               <a:t>강의 특징 · 관리 프로그램</a:t>
             </a:r>
             <a:endParaRPr lang="en-US" sz="1200" dirty="0">
-              <a:latin typeface="Pretendard Medium" panose="02000603000000020004" pitchFamily="2" charset="-127"/>
-              <a:ea typeface="Pretendard Medium" panose="02000603000000020004" pitchFamily="2" charset="-127"/>
+              <a:latin typeface="페이퍼로지 5 Medium" pitchFamily="2" charset="-127"/>
+              <a:ea typeface="페이퍼로지 5 Medium" pitchFamily="2" charset="-127"/>
               <a:cs typeface="Pretendard Medium" panose="02000603000000020004" pitchFamily="2" charset="-127"/>
             </a:endParaRPr>
           </a:p>
@@ -2248,7 +2374,13 @@
         </p:spPr>
         <p:txBody>
           <a:bodyPr/>
-          <a:p/>
+          <a:lstStyle/>
+          <a:p>
+            <a:endParaRPr>
+              <a:latin typeface="페이퍼로지 5 Medium" pitchFamily="2" charset="-127"/>
+              <a:ea typeface="페이퍼로지 5 Medium" pitchFamily="2" charset="-127"/>
+            </a:endParaRPr>
+          </a:p>
         </p:txBody>
       </p:sp>
       <p:sp>
@@ -2272,7 +2404,13 @@
         </p:spPr>
         <p:txBody>
           <a:bodyPr/>
-          <a:p/>
+          <a:lstStyle/>
+          <a:p>
+            <a:endParaRPr>
+              <a:latin typeface="페이퍼로지 5 Medium" pitchFamily="2" charset="-127"/>
+              <a:ea typeface="페이퍼로지 5 Medium" pitchFamily="2" charset="-127"/>
+            </a:endParaRPr>
+          </a:p>
         </p:txBody>
       </p:sp>
       <p:sp>
@@ -2296,7 +2434,13 @@
         </p:spPr>
         <p:txBody>
           <a:bodyPr/>
-          <a:p/>
+          <a:lstStyle/>
+          <a:p>
+            <a:endParaRPr>
+              <a:latin typeface="페이퍼로지 5 Medium" pitchFamily="2" charset="-127"/>
+              <a:ea typeface="페이퍼로지 5 Medium" pitchFamily="2" charset="-127"/>
+            </a:endParaRPr>
+          </a:p>
         </p:txBody>
       </p:sp>
       <p:sp>
@@ -2320,7 +2464,13 @@
         </p:spPr>
         <p:txBody>
           <a:bodyPr/>
-          <a:p/>
+          <a:lstStyle/>
+          <a:p>
+            <a:endParaRPr>
+              <a:latin typeface="페이퍼로지 5 Medium" pitchFamily="2" charset="-127"/>
+              <a:ea typeface="페이퍼로지 5 Medium" pitchFamily="2" charset="-127"/>
+            </a:endParaRPr>
+          </a:p>
         </p:txBody>
       </p:sp>
       <p:sp>
@@ -2354,15 +2504,15 @@
                 <a:solidFill>
                   <a:srgbClr val="3A3A3A"/>
                 </a:solidFill>
-                <a:latin typeface="Pretendard Medium" panose="02000603000000020004" pitchFamily="2" charset="-127"/>
-                <a:ea typeface="Pretendard Medium" panose="02000603000000020004" pitchFamily="2" charset="-127"/>
+                <a:latin typeface="페이퍼로지 5 Medium" pitchFamily="2" charset="-127"/>
+                <a:ea typeface="페이퍼로지 5 Medium" pitchFamily="2" charset="-127"/>
                 <a:cs typeface="Pretendard Medium" panose="02000603000000020004" pitchFamily="2" charset="-127"/>
               </a:rPr>
               <a:t>강의특징</a:t>
             </a:r>
             <a:endParaRPr lang="en-US" sz="938" dirty="0">
-              <a:latin typeface="Pretendard Medium" panose="02000603000000020004" pitchFamily="2" charset="-127"/>
-              <a:ea typeface="Pretendard Medium" panose="02000603000000020004" pitchFamily="2" charset="-127"/>
+              <a:latin typeface="페이퍼로지 5 Medium" pitchFamily="2" charset="-127"/>
+              <a:ea typeface="페이퍼로지 5 Medium" pitchFamily="2" charset="-127"/>
               <a:cs typeface="Pretendard Medium" panose="02000603000000020004" pitchFamily="2" charset="-127"/>
             </a:endParaRPr>
           </a:p>
@@ -2391,7 +2541,13 @@
         </p:spPr>
         <p:txBody>
           <a:bodyPr/>
-          <a:p/>
+          <a:lstStyle/>
+          <a:p>
+            <a:endParaRPr>
+              <a:latin typeface="페이퍼로지 5 Medium" pitchFamily="2" charset="-127"/>
+              <a:ea typeface="페이퍼로지 5 Medium" pitchFamily="2" charset="-127"/>
+            </a:endParaRPr>
+          </a:p>
         </p:txBody>
       </p:sp>
       <p:sp>
@@ -2413,7 +2569,7 @@
         </p:spPr>
         <p:txBody>
           <a:bodyPr wrap="square" lIns="25400" tIns="25400" rIns="25400" bIns="25400" rtlCol="0" anchor="t">
-            <a:normAutofit fontScale="92500" lnSpcReduction="20000"/>
+            <a:normAutofit fontScale="77500" lnSpcReduction="20000"/>
           </a:bodyPr>
           <a:lstStyle/>
           <a:p>
@@ -2429,15 +2585,15 @@
                 <a:solidFill>
                   <a:srgbClr val="2B2B2B"/>
                 </a:solidFill>
-                <a:latin typeface="Pretendard Medium" panose="02000603000000020004" pitchFamily="2" charset="-127"/>
-                <a:ea typeface="Pretendard Medium" panose="02000603000000020004" pitchFamily="2" charset="-127"/>
+                <a:latin typeface="페이퍼로지 5 Medium" pitchFamily="2" charset="-127"/>
+                <a:ea typeface="페이퍼로지 5 Medium" pitchFamily="2" charset="-127"/>
                 <a:cs typeface="Pretendard Medium" panose="02000603000000020004" pitchFamily="2" charset="-127"/>
               </a:rPr>
               <a:t>{{강의특징}}</a:t>
             </a:r>
             <a:endParaRPr lang="en-US" sz="863" dirty="0">
-              <a:latin typeface="Pretendard Medium" panose="02000603000000020004" pitchFamily="2" charset="-127"/>
-              <a:ea typeface="Pretendard Medium" panose="02000603000000020004" pitchFamily="2" charset="-127"/>
+              <a:latin typeface="페이퍼로지 5 Medium" pitchFamily="2" charset="-127"/>
+              <a:ea typeface="페이퍼로지 5 Medium" pitchFamily="2" charset="-127"/>
               <a:cs typeface="Pretendard Medium" panose="02000603000000020004" pitchFamily="2" charset="-127"/>
             </a:endParaRPr>
           </a:p>
@@ -2464,7 +2620,13 @@
         </p:spPr>
         <p:txBody>
           <a:bodyPr/>
-          <a:p/>
+          <a:lstStyle/>
+          <a:p>
+            <a:endParaRPr>
+              <a:latin typeface="페이퍼로지 5 Medium" pitchFamily="2" charset="-127"/>
+              <a:ea typeface="페이퍼로지 5 Medium" pitchFamily="2" charset="-127"/>
+            </a:endParaRPr>
+          </a:p>
         </p:txBody>
       </p:sp>
       <p:sp>
@@ -2488,7 +2650,13 @@
         </p:spPr>
         <p:txBody>
           <a:bodyPr/>
-          <a:p/>
+          <a:lstStyle/>
+          <a:p>
+            <a:endParaRPr>
+              <a:latin typeface="페이퍼로지 5 Medium" pitchFamily="2" charset="-127"/>
+              <a:ea typeface="페이퍼로지 5 Medium" pitchFamily="2" charset="-127"/>
+            </a:endParaRPr>
+          </a:p>
         </p:txBody>
       </p:sp>
       <p:sp>
@@ -2512,7 +2680,13 @@
         </p:spPr>
         <p:txBody>
           <a:bodyPr/>
-          <a:p/>
+          <a:lstStyle/>
+          <a:p>
+            <a:endParaRPr>
+              <a:latin typeface="페이퍼로지 5 Medium" pitchFamily="2" charset="-127"/>
+              <a:ea typeface="페이퍼로지 5 Medium" pitchFamily="2" charset="-127"/>
+            </a:endParaRPr>
+          </a:p>
         </p:txBody>
       </p:sp>
       <p:sp>
@@ -2536,7 +2710,13 @@
         </p:spPr>
         <p:txBody>
           <a:bodyPr/>
-          <a:p/>
+          <a:lstStyle/>
+          <a:p>
+            <a:endParaRPr>
+              <a:latin typeface="페이퍼로지 5 Medium" pitchFamily="2" charset="-127"/>
+              <a:ea typeface="페이퍼로지 5 Medium" pitchFamily="2" charset="-127"/>
+            </a:endParaRPr>
+          </a:p>
         </p:txBody>
       </p:sp>
       <p:sp>
@@ -2570,15 +2750,15 @@
                 <a:solidFill>
                   <a:srgbClr val="3A3A3A"/>
                 </a:solidFill>
-                <a:latin typeface="Pretendard Medium" panose="02000603000000020004" pitchFamily="2" charset="-127"/>
-                <a:ea typeface="Pretendard Medium" panose="02000603000000020004" pitchFamily="2" charset="-127"/>
+                <a:latin typeface="페이퍼로지 5 Medium" pitchFamily="2" charset="-127"/>
+                <a:ea typeface="페이퍼로지 5 Medium" pitchFamily="2" charset="-127"/>
                 <a:cs typeface="Pretendard Medium" panose="02000603000000020004" pitchFamily="2" charset="-127"/>
               </a:rPr>
               <a:t>관리 프로그램</a:t>
             </a:r>
             <a:endParaRPr lang="en-US" sz="938" dirty="0">
-              <a:latin typeface="Pretendard Medium" panose="02000603000000020004" pitchFamily="2" charset="-127"/>
-              <a:ea typeface="Pretendard Medium" panose="02000603000000020004" pitchFamily="2" charset="-127"/>
+              <a:latin typeface="페이퍼로지 5 Medium" pitchFamily="2" charset="-127"/>
+              <a:ea typeface="페이퍼로지 5 Medium" pitchFamily="2" charset="-127"/>
               <a:cs typeface="Pretendard Medium" panose="02000603000000020004" pitchFamily="2" charset="-127"/>
             </a:endParaRPr>
           </a:p>
@@ -2607,7 +2787,13 @@
         </p:spPr>
         <p:txBody>
           <a:bodyPr/>
-          <a:p/>
+          <a:lstStyle/>
+          <a:p>
+            <a:endParaRPr>
+              <a:latin typeface="페이퍼로지 5 Medium" pitchFamily="2" charset="-127"/>
+              <a:ea typeface="페이퍼로지 5 Medium" pitchFamily="2" charset="-127"/>
+            </a:endParaRPr>
+          </a:p>
         </p:txBody>
       </p:sp>
       <p:sp>
@@ -2629,7 +2815,7 @@
         </p:spPr>
         <p:txBody>
           <a:bodyPr wrap="square" lIns="25400" tIns="25400" rIns="25400" bIns="25400" rtlCol="0" anchor="t">
-            <a:normAutofit fontScale="92500" lnSpcReduction="20000"/>
+            <a:normAutofit fontScale="77500" lnSpcReduction="20000"/>
           </a:bodyPr>
           <a:lstStyle/>
           <a:p>
@@ -2645,15 +2831,15 @@
                 <a:solidFill>
                   <a:srgbClr val="2B2B2B"/>
                 </a:solidFill>
-                <a:latin typeface="Pretendard Medium" panose="02000603000000020004" pitchFamily="2" charset="-127"/>
-                <a:ea typeface="Pretendard Medium" panose="02000603000000020004" pitchFamily="2" charset="-127"/>
+                <a:latin typeface="페이퍼로지 5 Medium" pitchFamily="2" charset="-127"/>
+                <a:ea typeface="페이퍼로지 5 Medium" pitchFamily="2" charset="-127"/>
                 <a:cs typeface="Pretendard Medium" panose="02000603000000020004" pitchFamily="2" charset="-127"/>
               </a:rPr>
               <a:t>{{관리프로그램}}</a:t>
             </a:r>
             <a:endParaRPr lang="en-US" sz="863" dirty="0">
-              <a:latin typeface="Pretendard Medium" panose="02000603000000020004" pitchFamily="2" charset="-127"/>
-              <a:ea typeface="Pretendard Medium" panose="02000603000000020004" pitchFamily="2" charset="-127"/>
+              <a:latin typeface="페이퍼로지 5 Medium" pitchFamily="2" charset="-127"/>
+              <a:ea typeface="페이퍼로지 5 Medium" pitchFamily="2" charset="-127"/>
               <a:cs typeface="Pretendard Medium" panose="02000603000000020004" pitchFamily="2" charset="-127"/>
             </a:endParaRPr>
           </a:p>
@@ -2667,7 +2853,7 @@
         </p:nvSpPr>
         <p:spPr>
           <a:xfrm>
-            <a:off x="419100" y="5824800"/>
+            <a:off x="419100" y="6683320"/>
             <a:ext cx="38100" cy="161925"/>
           </a:xfrm>
           <a:prstGeom prst="roundRect">
@@ -2682,7 +2868,13 @@
         </p:spPr>
         <p:txBody>
           <a:bodyPr/>
-          <a:p/>
+          <a:lstStyle/>
+          <a:p>
+            <a:endParaRPr>
+              <a:latin typeface="페이퍼로지 5 Medium" pitchFamily="2" charset="-127"/>
+              <a:ea typeface="페이퍼로지 5 Medium" pitchFamily="2" charset="-127"/>
+            </a:endParaRPr>
+          </a:p>
         </p:txBody>
       </p:sp>
       <p:sp>
@@ -2693,7 +2885,7 @@
         </p:nvSpPr>
         <p:spPr>
           <a:xfrm>
-            <a:off x="533400" y="5814000"/>
+            <a:off x="533400" y="6672520"/>
             <a:ext cx="1672114" cy="220980"/>
           </a:xfrm>
           <a:prstGeom prst="rect">
@@ -2716,15 +2908,15 @@
                 <a:solidFill>
                   <a:srgbClr val="161616"/>
                 </a:solidFill>
-                <a:latin typeface="Pretendard Medium" panose="02000603000000020004" pitchFamily="2" charset="-127"/>
-                <a:ea typeface="Pretendard Medium" panose="02000603000000020004" pitchFamily="2" charset="-127"/>
+                <a:latin typeface="페이퍼로지 5 Medium" pitchFamily="2" charset="-127"/>
+                <a:ea typeface="페이퍼로지 5 Medium" pitchFamily="2" charset="-127"/>
                 <a:cs typeface="Pretendard Medium" panose="02000603000000020004" pitchFamily="2" charset="-127"/>
               </a:rPr>
               <a:t>주차별 진도 계획</a:t>
             </a:r>
             <a:endParaRPr lang="en-US" sz="1200" dirty="0">
-              <a:latin typeface="Pretendard Medium" panose="02000603000000020004" pitchFamily="2" charset="-127"/>
-              <a:ea typeface="Pretendard Medium" panose="02000603000000020004" pitchFamily="2" charset="-127"/>
+              <a:latin typeface="페이퍼로지 5 Medium" pitchFamily="2" charset="-127"/>
+              <a:ea typeface="페이퍼로지 5 Medium" pitchFamily="2" charset="-127"/>
               <a:cs typeface="Pretendard Medium" panose="02000603000000020004" pitchFamily="2" charset="-127"/>
             </a:endParaRPr>
           </a:p>
@@ -2738,7 +2930,7 @@
         </p:nvSpPr>
         <p:spPr>
           <a:xfrm>
-            <a:off x="422910" y="6087600"/>
+            <a:off x="422910" y="6946120"/>
             <a:ext cx="800100" cy="297180"/>
           </a:xfrm>
           <a:prstGeom prst="rect">
@@ -2756,7 +2948,13 @@
         </p:spPr>
         <p:txBody>
           <a:bodyPr/>
-          <a:p/>
+          <a:lstStyle/>
+          <a:p>
+            <a:endParaRPr>
+              <a:latin typeface="페이퍼로지 5 Medium" pitchFamily="2" charset="-127"/>
+              <a:ea typeface="페이퍼로지 5 Medium" pitchFamily="2" charset="-127"/>
+            </a:endParaRPr>
+          </a:p>
         </p:txBody>
       </p:sp>
       <p:sp>
@@ -2767,7 +2965,7 @@
         </p:nvSpPr>
         <p:spPr>
           <a:xfrm>
-            <a:off x="544830" y="6170400"/>
+            <a:off x="544830" y="7028920"/>
             <a:ext cx="632460" cy="167640"/>
           </a:xfrm>
           <a:prstGeom prst="rect">
@@ -2790,15 +2988,15 @@
                 <a:solidFill>
                   <a:srgbClr val="3A3A3A"/>
                 </a:solidFill>
-                <a:latin typeface="Pretendard Medium" panose="02000603000000020004" pitchFamily="2" charset="-127"/>
-                <a:ea typeface="Pretendard Medium" panose="02000603000000020004" pitchFamily="2" charset="-127"/>
+                <a:latin typeface="페이퍼로지 5 Medium" pitchFamily="2" charset="-127"/>
+                <a:ea typeface="페이퍼로지 5 Medium" pitchFamily="2" charset="-127"/>
                 <a:cs typeface="Pretendard Medium" panose="02000603000000020004" pitchFamily="2" charset="-127"/>
               </a:rPr>
               <a:t>주차</a:t>
             </a:r>
             <a:endParaRPr lang="en-US" sz="900" dirty="0">
-              <a:latin typeface="Pretendard Medium" panose="02000603000000020004" pitchFamily="2" charset="-127"/>
-              <a:ea typeface="Pretendard Medium" panose="02000603000000020004" pitchFamily="2" charset="-127"/>
+              <a:latin typeface="페이퍼로지 5 Medium" pitchFamily="2" charset="-127"/>
+              <a:ea typeface="페이퍼로지 5 Medium" pitchFamily="2" charset="-127"/>
               <a:cs typeface="Pretendard Medium" panose="02000603000000020004" pitchFamily="2" charset="-127"/>
             </a:endParaRPr>
           </a:p>
@@ -2812,7 +3010,7 @@
         </p:nvSpPr>
         <p:spPr>
           <a:xfrm>
-            <a:off x="1223010" y="6087600"/>
+            <a:off x="1223010" y="6946120"/>
             <a:ext cx="2558415" cy="297180"/>
           </a:xfrm>
           <a:prstGeom prst="rect">
@@ -2830,7 +3028,13 @@
         </p:spPr>
         <p:txBody>
           <a:bodyPr/>
-          <a:p/>
+          <a:lstStyle/>
+          <a:p>
+            <a:endParaRPr>
+              <a:latin typeface="페이퍼로지 5 Medium" pitchFamily="2" charset="-127"/>
+              <a:ea typeface="페이퍼로지 5 Medium" pitchFamily="2" charset="-127"/>
+            </a:endParaRPr>
+          </a:p>
         </p:txBody>
       </p:sp>
       <p:sp>
@@ -2841,7 +3045,7 @@
         </p:nvSpPr>
         <p:spPr>
           <a:xfrm>
-            <a:off x="1344930" y="6170400"/>
+            <a:off x="1344930" y="7028920"/>
             <a:ext cx="2391328" cy="167640"/>
           </a:xfrm>
           <a:prstGeom prst="rect">
@@ -2864,15 +3068,15 @@
                 <a:solidFill>
                   <a:srgbClr val="3A3A3A"/>
                 </a:solidFill>
-                <a:latin typeface="Pretendard Medium" panose="02000603000000020004" pitchFamily="2" charset="-127"/>
-                <a:ea typeface="Pretendard Medium" panose="02000603000000020004" pitchFamily="2" charset="-127"/>
+                <a:latin typeface="페이퍼로지 5 Medium" pitchFamily="2" charset="-127"/>
+                <a:ea typeface="페이퍼로지 5 Medium" pitchFamily="2" charset="-127"/>
                 <a:cs typeface="Pretendard Medium" panose="02000603000000020004" pitchFamily="2" charset="-127"/>
               </a:rPr>
               <a:t>단원 및 수업내용</a:t>
             </a:r>
             <a:endParaRPr lang="en-US" sz="900" dirty="0">
-              <a:latin typeface="Pretendard Medium" panose="02000603000000020004" pitchFamily="2" charset="-127"/>
-              <a:ea typeface="Pretendard Medium" panose="02000603000000020004" pitchFamily="2" charset="-127"/>
+              <a:latin typeface="페이퍼로지 5 Medium" pitchFamily="2" charset="-127"/>
+              <a:ea typeface="페이퍼로지 5 Medium" pitchFamily="2" charset="-127"/>
               <a:cs typeface="Pretendard Medium" panose="02000603000000020004" pitchFamily="2" charset="-127"/>
             </a:endParaRPr>
           </a:p>
@@ -2886,7 +3090,7 @@
         </p:nvSpPr>
         <p:spPr>
           <a:xfrm>
-            <a:off x="3781425" y="6087600"/>
+            <a:off x="3781425" y="6946120"/>
             <a:ext cx="800100" cy="297180"/>
           </a:xfrm>
           <a:prstGeom prst="rect">
@@ -2904,7 +3108,13 @@
         </p:spPr>
         <p:txBody>
           <a:bodyPr/>
-          <a:p/>
+          <a:lstStyle/>
+          <a:p>
+            <a:endParaRPr>
+              <a:latin typeface="페이퍼로지 5 Medium" pitchFamily="2" charset="-127"/>
+              <a:ea typeface="페이퍼로지 5 Medium" pitchFamily="2" charset="-127"/>
+            </a:endParaRPr>
+          </a:p>
         </p:txBody>
       </p:sp>
       <p:sp>
@@ -2915,7 +3125,7 @@
         </p:nvSpPr>
         <p:spPr>
           <a:xfrm>
-            <a:off x="3903345" y="6170400"/>
+            <a:off x="3903345" y="7028920"/>
             <a:ext cx="632460" cy="167640"/>
           </a:xfrm>
           <a:prstGeom prst="rect">
@@ -2938,15 +3148,15 @@
                 <a:solidFill>
                   <a:srgbClr val="3A3A3A"/>
                 </a:solidFill>
-                <a:latin typeface="Pretendard Medium" panose="02000603000000020004" pitchFamily="2" charset="-127"/>
-                <a:ea typeface="Pretendard Medium" panose="02000603000000020004" pitchFamily="2" charset="-127"/>
+                <a:latin typeface="페이퍼로지 5 Medium" pitchFamily="2" charset="-127"/>
+                <a:ea typeface="페이퍼로지 5 Medium" pitchFamily="2" charset="-127"/>
                 <a:cs typeface="Pretendard Medium" panose="02000603000000020004" pitchFamily="2" charset="-127"/>
               </a:rPr>
               <a:t>주차</a:t>
             </a:r>
             <a:endParaRPr lang="en-US" sz="900" dirty="0">
-              <a:latin typeface="Pretendard Medium" panose="02000603000000020004" pitchFamily="2" charset="-127"/>
-              <a:ea typeface="Pretendard Medium" panose="02000603000000020004" pitchFamily="2" charset="-127"/>
+              <a:latin typeface="페이퍼로지 5 Medium" pitchFamily="2" charset="-127"/>
+              <a:ea typeface="페이퍼로지 5 Medium" pitchFamily="2" charset="-127"/>
               <a:cs typeface="Pretendard Medium" panose="02000603000000020004" pitchFamily="2" charset="-127"/>
             </a:endParaRPr>
           </a:p>
@@ -2960,7 +3170,7 @@
         </p:nvSpPr>
         <p:spPr>
           <a:xfrm>
-            <a:off x="4581525" y="6087600"/>
+            <a:off x="4581525" y="6946120"/>
             <a:ext cx="2558415" cy="297180"/>
           </a:xfrm>
           <a:prstGeom prst="rect">
@@ -2978,7 +3188,13 @@
         </p:spPr>
         <p:txBody>
           <a:bodyPr/>
-          <a:p/>
+          <a:lstStyle/>
+          <a:p>
+            <a:endParaRPr>
+              <a:latin typeface="페이퍼로지 5 Medium" pitchFamily="2" charset="-127"/>
+              <a:ea typeface="페이퍼로지 5 Medium" pitchFamily="2" charset="-127"/>
+            </a:endParaRPr>
+          </a:p>
         </p:txBody>
       </p:sp>
       <p:sp>
@@ -2989,7 +3205,7 @@
         </p:nvSpPr>
         <p:spPr>
           <a:xfrm>
-            <a:off x="4703445" y="6170400"/>
+            <a:off x="4703445" y="7028920"/>
             <a:ext cx="2391328" cy="167640"/>
           </a:xfrm>
           <a:prstGeom prst="rect">
@@ -3012,15 +3228,15 @@
                 <a:solidFill>
                   <a:srgbClr val="3A3A3A"/>
                 </a:solidFill>
-                <a:latin typeface="Pretendard Medium" panose="02000603000000020004" pitchFamily="2" charset="-127"/>
-                <a:ea typeface="Pretendard Medium" panose="02000603000000020004" pitchFamily="2" charset="-127"/>
+                <a:latin typeface="페이퍼로지 5 Medium" pitchFamily="2" charset="-127"/>
+                <a:ea typeface="페이퍼로지 5 Medium" pitchFamily="2" charset="-127"/>
                 <a:cs typeface="Pretendard Medium" panose="02000603000000020004" pitchFamily="2" charset="-127"/>
               </a:rPr>
               <a:t>단원 및 수업내용</a:t>
             </a:r>
             <a:endParaRPr lang="en-US" sz="900" dirty="0">
-              <a:latin typeface="Pretendard Medium" panose="02000603000000020004" pitchFamily="2" charset="-127"/>
-              <a:ea typeface="Pretendard Medium" panose="02000603000000020004" pitchFamily="2" charset="-127"/>
+              <a:latin typeface="페이퍼로지 5 Medium" pitchFamily="2" charset="-127"/>
+              <a:ea typeface="페이퍼로지 5 Medium" pitchFamily="2" charset="-127"/>
               <a:cs typeface="Pretendard Medium" panose="02000603000000020004" pitchFamily="2" charset="-127"/>
             </a:endParaRPr>
           </a:p>
@@ -3034,7 +3250,7 @@
         </p:nvSpPr>
         <p:spPr>
           <a:xfrm>
-            <a:off x="422910" y="6382800"/>
+            <a:off x="422910" y="7241320"/>
             <a:ext cx="800100" cy="306000"/>
           </a:xfrm>
           <a:prstGeom prst="rect">
@@ -3049,7 +3265,13 @@
         </p:spPr>
         <p:txBody>
           <a:bodyPr/>
-          <a:p/>
+          <a:lstStyle/>
+          <a:p>
+            <a:endParaRPr>
+              <a:latin typeface="페이퍼로지 5 Medium" pitchFamily="2" charset="-127"/>
+              <a:ea typeface="페이퍼로지 5 Medium" pitchFamily="2" charset="-127"/>
+            </a:endParaRPr>
+          </a:p>
         </p:txBody>
       </p:sp>
       <p:sp>
@@ -3060,7 +3282,7 @@
         </p:nvSpPr>
         <p:spPr>
           <a:xfrm>
-            <a:off x="544830" y="6447600"/>
+            <a:off x="544830" y="7306120"/>
             <a:ext cx="632460" cy="223200"/>
           </a:xfrm>
           <a:prstGeom prst="rect">
@@ -3071,7 +3293,7 @@
         </p:spPr>
         <p:txBody>
           <a:bodyPr wrap="square" lIns="25400" tIns="25400" rIns="25400" bIns="25400" rtlCol="0" anchor="ctr">
-            <a:normAutofit lnSpcReduction="10000"/>
+            <a:normAutofit fontScale="85000" lnSpcReduction="20000"/>
           </a:bodyPr>
           <a:lstStyle/>
           <a:p>
@@ -3083,15 +3305,15 @@
                 <a:solidFill>
                   <a:srgbClr val="2B2B2B"/>
                 </a:solidFill>
-                <a:latin typeface="Pretendard Medium" panose="02000603000000020004" pitchFamily="2" charset="-127"/>
-                <a:ea typeface="Pretendard Medium" panose="02000603000000020004" pitchFamily="2" charset="-127"/>
+                <a:latin typeface="페이퍼로지 5 Medium" pitchFamily="2" charset="-127"/>
+                <a:ea typeface="페이퍼로지 5 Medium" pitchFamily="2" charset="-127"/>
                 <a:cs typeface="Pretendard Medium" panose="02000603000000020004" pitchFamily="2" charset="-127"/>
               </a:rPr>
               <a:t>{{진도_좌_1_날짜}}</a:t>
             </a:r>
             <a:endParaRPr lang="en-US" sz="863" dirty="0">
-              <a:latin typeface="Pretendard Medium" panose="02000603000000020004" pitchFamily="2" charset="-127"/>
-              <a:ea typeface="Pretendard Medium" panose="02000603000000020004" pitchFamily="2" charset="-127"/>
+              <a:latin typeface="페이퍼로지 5 Medium" pitchFamily="2" charset="-127"/>
+              <a:ea typeface="페이퍼로지 5 Medium" pitchFamily="2" charset="-127"/>
               <a:cs typeface="Pretendard Medium" panose="02000603000000020004" pitchFamily="2" charset="-127"/>
             </a:endParaRPr>
           </a:p>
@@ -3105,7 +3327,7 @@
         </p:nvSpPr>
         <p:spPr>
           <a:xfrm>
-            <a:off x="1223010" y="6382800"/>
+            <a:off x="1223010" y="7241320"/>
             <a:ext cx="2558415" cy="306000"/>
           </a:xfrm>
           <a:prstGeom prst="rect">
@@ -3120,7 +3342,13 @@
         </p:spPr>
         <p:txBody>
           <a:bodyPr/>
-          <a:p/>
+          <a:lstStyle/>
+          <a:p>
+            <a:endParaRPr>
+              <a:latin typeface="페이퍼로지 5 Medium" pitchFamily="2" charset="-127"/>
+              <a:ea typeface="페이퍼로지 5 Medium" pitchFamily="2" charset="-127"/>
+            </a:endParaRPr>
+          </a:p>
         </p:txBody>
       </p:sp>
       <p:sp>
@@ -3131,7 +3359,7 @@
         </p:nvSpPr>
         <p:spPr>
           <a:xfrm>
-            <a:off x="1344930" y="6447600"/>
+            <a:off x="1344930" y="7306120"/>
             <a:ext cx="2391328" cy="223200"/>
           </a:xfrm>
           <a:prstGeom prst="rect">
@@ -3154,15 +3382,15 @@
                 <a:solidFill>
                   <a:srgbClr val="2B2B2B"/>
                 </a:solidFill>
-                <a:latin typeface="Pretendard Medium" panose="02000603000000020004" pitchFamily="2" charset="-127"/>
-                <a:ea typeface="Pretendard Medium" panose="02000603000000020004" pitchFamily="2" charset="-127"/>
+                <a:latin typeface="페이퍼로지 5 Medium" pitchFamily="2" charset="-127"/>
+                <a:ea typeface="페이퍼로지 5 Medium" pitchFamily="2" charset="-127"/>
                 <a:cs typeface="Pretendard Medium" panose="02000603000000020004" pitchFamily="2" charset="-127"/>
               </a:rPr>
               <a:t>{{진도_좌_1_내용}}</a:t>
             </a:r>
             <a:endParaRPr lang="en-US" sz="863" dirty="0">
-              <a:latin typeface="Pretendard Medium" panose="02000603000000020004" pitchFamily="2" charset="-127"/>
-              <a:ea typeface="Pretendard Medium" panose="02000603000000020004" pitchFamily="2" charset="-127"/>
+              <a:latin typeface="페이퍼로지 5 Medium" pitchFamily="2" charset="-127"/>
+              <a:ea typeface="페이퍼로지 5 Medium" pitchFamily="2" charset="-127"/>
               <a:cs typeface="Pretendard Medium" panose="02000603000000020004" pitchFamily="2" charset="-127"/>
             </a:endParaRPr>
           </a:p>
@@ -3176,7 +3404,7 @@
         </p:nvSpPr>
         <p:spPr>
           <a:xfrm>
-            <a:off x="3781425" y="6382800"/>
+            <a:off x="3781425" y="7241320"/>
             <a:ext cx="800100" cy="306000"/>
           </a:xfrm>
           <a:prstGeom prst="rect">
@@ -3191,7 +3419,13 @@
         </p:spPr>
         <p:txBody>
           <a:bodyPr/>
-          <a:p/>
+          <a:lstStyle/>
+          <a:p>
+            <a:endParaRPr>
+              <a:latin typeface="페이퍼로지 5 Medium" pitchFamily="2" charset="-127"/>
+              <a:ea typeface="페이퍼로지 5 Medium" pitchFamily="2" charset="-127"/>
+            </a:endParaRPr>
+          </a:p>
         </p:txBody>
       </p:sp>
       <p:sp>
@@ -3202,7 +3436,7 @@
         </p:nvSpPr>
         <p:spPr>
           <a:xfrm>
-            <a:off x="3903345" y="6447600"/>
+            <a:off x="3903345" y="7306120"/>
             <a:ext cx="632460" cy="223200"/>
           </a:xfrm>
           <a:prstGeom prst="rect">
@@ -3213,7 +3447,7 @@
         </p:spPr>
         <p:txBody>
           <a:bodyPr wrap="square" lIns="25400" tIns="25400" rIns="25400" bIns="25400" rtlCol="0" anchor="ctr">
-            <a:normAutofit lnSpcReduction="10000"/>
+            <a:normAutofit fontScale="85000" lnSpcReduction="20000"/>
           </a:bodyPr>
           <a:lstStyle/>
           <a:p>
@@ -3225,15 +3459,15 @@
                 <a:solidFill>
                   <a:srgbClr val="2B2B2B"/>
                 </a:solidFill>
-                <a:latin typeface="Pretendard Medium" panose="02000603000000020004" pitchFamily="2" charset="-127"/>
-                <a:ea typeface="Pretendard Medium" panose="02000603000000020004" pitchFamily="2" charset="-127"/>
+                <a:latin typeface="페이퍼로지 5 Medium" pitchFamily="2" charset="-127"/>
+                <a:ea typeface="페이퍼로지 5 Medium" pitchFamily="2" charset="-127"/>
                 <a:cs typeface="Pretendard Medium" panose="02000603000000020004" pitchFamily="2" charset="-127"/>
               </a:rPr>
               <a:t>{{진도_우_1_날짜}}</a:t>
             </a:r>
             <a:endParaRPr lang="en-US" sz="863" dirty="0">
-              <a:latin typeface="Pretendard Medium" panose="02000603000000020004" pitchFamily="2" charset="-127"/>
-              <a:ea typeface="Pretendard Medium" panose="02000603000000020004" pitchFamily="2" charset="-127"/>
+              <a:latin typeface="페이퍼로지 5 Medium" pitchFamily="2" charset="-127"/>
+              <a:ea typeface="페이퍼로지 5 Medium" pitchFamily="2" charset="-127"/>
               <a:cs typeface="Pretendard Medium" panose="02000603000000020004" pitchFamily="2" charset="-127"/>
             </a:endParaRPr>
           </a:p>
@@ -3247,7 +3481,7 @@
         </p:nvSpPr>
         <p:spPr>
           <a:xfrm>
-            <a:off x="4581525" y="6382800"/>
+            <a:off x="4581525" y="7241320"/>
             <a:ext cx="2558415" cy="306000"/>
           </a:xfrm>
           <a:prstGeom prst="rect">
@@ -3262,7 +3496,13 @@
         </p:spPr>
         <p:txBody>
           <a:bodyPr/>
-          <a:p/>
+          <a:lstStyle/>
+          <a:p>
+            <a:endParaRPr>
+              <a:latin typeface="페이퍼로지 5 Medium" pitchFamily="2" charset="-127"/>
+              <a:ea typeface="페이퍼로지 5 Medium" pitchFamily="2" charset="-127"/>
+            </a:endParaRPr>
+          </a:p>
         </p:txBody>
       </p:sp>
       <p:sp>
@@ -3273,7 +3513,7 @@
         </p:nvSpPr>
         <p:spPr>
           <a:xfrm>
-            <a:off x="4703445" y="6447600"/>
+            <a:off x="4703445" y="7306120"/>
             <a:ext cx="2391328" cy="223200"/>
           </a:xfrm>
           <a:prstGeom prst="rect">
@@ -3296,15 +3536,15 @@
                 <a:solidFill>
                   <a:srgbClr val="2B2B2B"/>
                 </a:solidFill>
-                <a:latin typeface="Pretendard Medium" panose="02000603000000020004" pitchFamily="2" charset="-127"/>
-                <a:ea typeface="Pretendard Medium" panose="02000603000000020004" pitchFamily="2" charset="-127"/>
+                <a:latin typeface="페이퍼로지 5 Medium" pitchFamily="2" charset="-127"/>
+                <a:ea typeface="페이퍼로지 5 Medium" pitchFamily="2" charset="-127"/>
                 <a:cs typeface="Pretendard Medium" panose="02000603000000020004" pitchFamily="2" charset="-127"/>
               </a:rPr>
               <a:t>{{진도_우_1_내용}}</a:t>
             </a:r>
             <a:endParaRPr lang="en-US" sz="863" dirty="0">
-              <a:latin typeface="Pretendard Medium" panose="02000603000000020004" pitchFamily="2" charset="-127"/>
-              <a:ea typeface="Pretendard Medium" panose="02000603000000020004" pitchFamily="2" charset="-127"/>
+              <a:latin typeface="페이퍼로지 5 Medium" pitchFamily="2" charset="-127"/>
+              <a:ea typeface="페이퍼로지 5 Medium" pitchFamily="2" charset="-127"/>
               <a:cs typeface="Pretendard Medium" panose="02000603000000020004" pitchFamily="2" charset="-127"/>
             </a:endParaRPr>
           </a:p>
@@ -3318,7 +3558,7 @@
         </p:nvSpPr>
         <p:spPr>
           <a:xfrm>
-            <a:off x="422910" y="6688800"/>
+            <a:off x="422910" y="7547320"/>
             <a:ext cx="800100" cy="306000"/>
           </a:xfrm>
           <a:prstGeom prst="rect">
@@ -3333,7 +3573,13 @@
         </p:spPr>
         <p:txBody>
           <a:bodyPr/>
-          <a:p/>
+          <a:lstStyle/>
+          <a:p>
+            <a:endParaRPr>
+              <a:latin typeface="페이퍼로지 5 Medium" pitchFamily="2" charset="-127"/>
+              <a:ea typeface="페이퍼로지 5 Medium" pitchFamily="2" charset="-127"/>
+            </a:endParaRPr>
+          </a:p>
         </p:txBody>
       </p:sp>
       <p:sp>
@@ -3344,7 +3590,7 @@
         </p:nvSpPr>
         <p:spPr>
           <a:xfrm>
-            <a:off x="544830" y="6753600"/>
+            <a:off x="544830" y="7612120"/>
             <a:ext cx="632460" cy="223200"/>
           </a:xfrm>
           <a:prstGeom prst="rect">
@@ -3355,7 +3601,7 @@
         </p:spPr>
         <p:txBody>
           <a:bodyPr wrap="square" lIns="25400" tIns="25400" rIns="25400" bIns="25400" rtlCol="0" anchor="ctr">
-            <a:normAutofit lnSpcReduction="10000"/>
+            <a:normAutofit fontScale="85000" lnSpcReduction="20000"/>
           </a:bodyPr>
           <a:lstStyle/>
           <a:p>
@@ -3367,15 +3613,15 @@
                 <a:solidFill>
                   <a:srgbClr val="2B2B2B"/>
                 </a:solidFill>
-                <a:latin typeface="Pretendard Medium" panose="02000603000000020004" pitchFamily="2" charset="-127"/>
-                <a:ea typeface="Pretendard Medium" panose="02000603000000020004" pitchFamily="2" charset="-127"/>
+                <a:latin typeface="페이퍼로지 5 Medium" pitchFamily="2" charset="-127"/>
+                <a:ea typeface="페이퍼로지 5 Medium" pitchFamily="2" charset="-127"/>
                 <a:cs typeface="Pretendard Medium" panose="02000603000000020004" pitchFamily="2" charset="-127"/>
               </a:rPr>
               <a:t>{{진도_좌_2_날짜}}</a:t>
             </a:r>
             <a:endParaRPr lang="en-US" sz="863" dirty="0">
-              <a:latin typeface="Pretendard Medium" panose="02000603000000020004" pitchFamily="2" charset="-127"/>
-              <a:ea typeface="Pretendard Medium" panose="02000603000000020004" pitchFamily="2" charset="-127"/>
+              <a:latin typeface="페이퍼로지 5 Medium" pitchFamily="2" charset="-127"/>
+              <a:ea typeface="페이퍼로지 5 Medium" pitchFamily="2" charset="-127"/>
               <a:cs typeface="Pretendard Medium" panose="02000603000000020004" pitchFamily="2" charset="-127"/>
             </a:endParaRPr>
           </a:p>
@@ -3389,7 +3635,7 @@
         </p:nvSpPr>
         <p:spPr>
           <a:xfrm>
-            <a:off x="1223010" y="6688800"/>
+            <a:off x="1223010" y="7547320"/>
             <a:ext cx="2558415" cy="306000"/>
           </a:xfrm>
           <a:prstGeom prst="rect">
@@ -3404,7 +3650,13 @@
         </p:spPr>
         <p:txBody>
           <a:bodyPr/>
-          <a:p/>
+          <a:lstStyle/>
+          <a:p>
+            <a:endParaRPr>
+              <a:latin typeface="페이퍼로지 5 Medium" pitchFamily="2" charset="-127"/>
+              <a:ea typeface="페이퍼로지 5 Medium" pitchFamily="2" charset="-127"/>
+            </a:endParaRPr>
+          </a:p>
         </p:txBody>
       </p:sp>
       <p:sp>
@@ -3415,7 +3667,7 @@
         </p:nvSpPr>
         <p:spPr>
           <a:xfrm>
-            <a:off x="1344930" y="6753600"/>
+            <a:off x="1344930" y="7612120"/>
             <a:ext cx="2391328" cy="223200"/>
           </a:xfrm>
           <a:prstGeom prst="rect">
@@ -3438,15 +3690,15 @@
                 <a:solidFill>
                   <a:srgbClr val="2B2B2B"/>
                 </a:solidFill>
-                <a:latin typeface="Pretendard Medium" panose="02000603000000020004" pitchFamily="2" charset="-127"/>
-                <a:ea typeface="Pretendard Medium" panose="02000603000000020004" pitchFamily="2" charset="-127"/>
+                <a:latin typeface="페이퍼로지 5 Medium" pitchFamily="2" charset="-127"/>
+                <a:ea typeface="페이퍼로지 5 Medium" pitchFamily="2" charset="-127"/>
                 <a:cs typeface="Pretendard Medium" panose="02000603000000020004" pitchFamily="2" charset="-127"/>
               </a:rPr>
               <a:t>{{진도_좌_2_내용}}</a:t>
             </a:r>
             <a:endParaRPr lang="en-US" sz="863" dirty="0">
-              <a:latin typeface="Pretendard Medium" panose="02000603000000020004" pitchFamily="2" charset="-127"/>
-              <a:ea typeface="Pretendard Medium" panose="02000603000000020004" pitchFamily="2" charset="-127"/>
+              <a:latin typeface="페이퍼로지 5 Medium" pitchFamily="2" charset="-127"/>
+              <a:ea typeface="페이퍼로지 5 Medium" pitchFamily="2" charset="-127"/>
               <a:cs typeface="Pretendard Medium" panose="02000603000000020004" pitchFamily="2" charset="-127"/>
             </a:endParaRPr>
           </a:p>
@@ -3460,7 +3712,7 @@
         </p:nvSpPr>
         <p:spPr>
           <a:xfrm>
-            <a:off x="3781425" y="6688800"/>
+            <a:off x="3781425" y="7547320"/>
             <a:ext cx="800100" cy="306000"/>
           </a:xfrm>
           <a:prstGeom prst="rect">
@@ -3475,7 +3727,13 @@
         </p:spPr>
         <p:txBody>
           <a:bodyPr/>
-          <a:p/>
+          <a:lstStyle/>
+          <a:p>
+            <a:endParaRPr>
+              <a:latin typeface="페이퍼로지 5 Medium" pitchFamily="2" charset="-127"/>
+              <a:ea typeface="페이퍼로지 5 Medium" pitchFamily="2" charset="-127"/>
+            </a:endParaRPr>
+          </a:p>
         </p:txBody>
       </p:sp>
       <p:sp>
@@ -3486,7 +3744,7 @@
         </p:nvSpPr>
         <p:spPr>
           <a:xfrm>
-            <a:off x="3903345" y="6753600"/>
+            <a:off x="3903345" y="7612120"/>
             <a:ext cx="632460" cy="223200"/>
           </a:xfrm>
           <a:prstGeom prst="rect">
@@ -3497,7 +3755,7 @@
         </p:spPr>
         <p:txBody>
           <a:bodyPr wrap="square" lIns="25400" tIns="25400" rIns="25400" bIns="25400" rtlCol="0" anchor="ctr">
-            <a:normAutofit lnSpcReduction="10000"/>
+            <a:normAutofit fontScale="85000" lnSpcReduction="20000"/>
           </a:bodyPr>
           <a:lstStyle/>
           <a:p>
@@ -3509,15 +3767,15 @@
                 <a:solidFill>
                   <a:srgbClr val="2B2B2B"/>
                 </a:solidFill>
-                <a:latin typeface="Pretendard Medium" panose="02000603000000020004" pitchFamily="2" charset="-127"/>
-                <a:ea typeface="Pretendard Medium" panose="02000603000000020004" pitchFamily="2" charset="-127"/>
+                <a:latin typeface="페이퍼로지 5 Medium" pitchFamily="2" charset="-127"/>
+                <a:ea typeface="페이퍼로지 5 Medium" pitchFamily="2" charset="-127"/>
                 <a:cs typeface="Pretendard Medium" panose="02000603000000020004" pitchFamily="2" charset="-127"/>
               </a:rPr>
               <a:t>{{진도_우_2_날짜}}</a:t>
             </a:r>
             <a:endParaRPr lang="en-US" sz="863" dirty="0">
-              <a:latin typeface="Pretendard Medium" panose="02000603000000020004" pitchFamily="2" charset="-127"/>
-              <a:ea typeface="Pretendard Medium" panose="02000603000000020004" pitchFamily="2" charset="-127"/>
+              <a:latin typeface="페이퍼로지 5 Medium" pitchFamily="2" charset="-127"/>
+              <a:ea typeface="페이퍼로지 5 Medium" pitchFamily="2" charset="-127"/>
               <a:cs typeface="Pretendard Medium" panose="02000603000000020004" pitchFamily="2" charset="-127"/>
             </a:endParaRPr>
           </a:p>
@@ -3531,7 +3789,7 @@
         </p:nvSpPr>
         <p:spPr>
           <a:xfrm>
-            <a:off x="4581525" y="6688800"/>
+            <a:off x="4581525" y="7547320"/>
             <a:ext cx="2558415" cy="306000"/>
           </a:xfrm>
           <a:prstGeom prst="rect">
@@ -3546,7 +3804,13 @@
         </p:spPr>
         <p:txBody>
           <a:bodyPr/>
-          <a:p/>
+          <a:lstStyle/>
+          <a:p>
+            <a:endParaRPr>
+              <a:latin typeface="페이퍼로지 5 Medium" pitchFamily="2" charset="-127"/>
+              <a:ea typeface="페이퍼로지 5 Medium" pitchFamily="2" charset="-127"/>
+            </a:endParaRPr>
+          </a:p>
         </p:txBody>
       </p:sp>
       <p:sp>
@@ -3557,7 +3821,7 @@
         </p:nvSpPr>
         <p:spPr>
           <a:xfrm>
-            <a:off x="4703445" y="6753600"/>
+            <a:off x="4703445" y="7612120"/>
             <a:ext cx="2391328" cy="223200"/>
           </a:xfrm>
           <a:prstGeom prst="rect">
@@ -3580,15 +3844,15 @@
                 <a:solidFill>
                   <a:srgbClr val="2B2B2B"/>
                 </a:solidFill>
-                <a:latin typeface="Pretendard Medium" panose="02000603000000020004" pitchFamily="2" charset="-127"/>
-                <a:ea typeface="Pretendard Medium" panose="02000603000000020004" pitchFamily="2" charset="-127"/>
+                <a:latin typeface="페이퍼로지 5 Medium" pitchFamily="2" charset="-127"/>
+                <a:ea typeface="페이퍼로지 5 Medium" pitchFamily="2" charset="-127"/>
                 <a:cs typeface="Pretendard Medium" panose="02000603000000020004" pitchFamily="2" charset="-127"/>
               </a:rPr>
               <a:t>{{진도_우_2_내용}}</a:t>
             </a:r>
             <a:endParaRPr lang="en-US" sz="863" dirty="0">
-              <a:latin typeface="Pretendard Medium" panose="02000603000000020004" pitchFamily="2" charset="-127"/>
-              <a:ea typeface="Pretendard Medium" panose="02000603000000020004" pitchFamily="2" charset="-127"/>
+              <a:latin typeface="페이퍼로지 5 Medium" pitchFamily="2" charset="-127"/>
+              <a:ea typeface="페이퍼로지 5 Medium" pitchFamily="2" charset="-127"/>
               <a:cs typeface="Pretendard Medium" panose="02000603000000020004" pitchFamily="2" charset="-127"/>
             </a:endParaRPr>
           </a:p>
@@ -3602,7 +3866,7 @@
         </p:nvSpPr>
         <p:spPr>
           <a:xfrm>
-            <a:off x="422910" y="6994800"/>
+            <a:off x="422910" y="7853320"/>
             <a:ext cx="800100" cy="306000"/>
           </a:xfrm>
           <a:prstGeom prst="rect">
@@ -3617,7 +3881,13 @@
         </p:spPr>
         <p:txBody>
           <a:bodyPr/>
-          <a:p/>
+          <a:lstStyle/>
+          <a:p>
+            <a:endParaRPr>
+              <a:latin typeface="페이퍼로지 5 Medium" pitchFamily="2" charset="-127"/>
+              <a:ea typeface="페이퍼로지 5 Medium" pitchFamily="2" charset="-127"/>
+            </a:endParaRPr>
+          </a:p>
         </p:txBody>
       </p:sp>
       <p:sp>
@@ -3628,7 +3898,7 @@
         </p:nvSpPr>
         <p:spPr>
           <a:xfrm>
-            <a:off x="544830" y="7059600"/>
+            <a:off x="544830" y="7918120"/>
             <a:ext cx="632460" cy="223200"/>
           </a:xfrm>
           <a:prstGeom prst="rect">
@@ -3639,7 +3909,7 @@
         </p:spPr>
         <p:txBody>
           <a:bodyPr wrap="square" lIns="25400" tIns="25400" rIns="25400" bIns="25400" rtlCol="0" anchor="ctr">
-            <a:normAutofit lnSpcReduction="10000"/>
+            <a:normAutofit fontScale="85000" lnSpcReduction="20000"/>
           </a:bodyPr>
           <a:lstStyle/>
           <a:p>
@@ -3651,15 +3921,15 @@
                 <a:solidFill>
                   <a:srgbClr val="2B2B2B"/>
                 </a:solidFill>
-                <a:latin typeface="Pretendard Medium" panose="02000603000000020004" pitchFamily="2" charset="-127"/>
-                <a:ea typeface="Pretendard Medium" panose="02000603000000020004" pitchFamily="2" charset="-127"/>
+                <a:latin typeface="페이퍼로지 5 Medium" pitchFamily="2" charset="-127"/>
+                <a:ea typeface="페이퍼로지 5 Medium" pitchFamily="2" charset="-127"/>
                 <a:cs typeface="Pretendard Medium" panose="02000603000000020004" pitchFamily="2" charset="-127"/>
               </a:rPr>
               <a:t>{{진도_좌_3_날짜}}</a:t>
             </a:r>
             <a:endParaRPr lang="en-US" sz="863" dirty="0">
-              <a:latin typeface="Pretendard Medium" panose="02000603000000020004" pitchFamily="2" charset="-127"/>
-              <a:ea typeface="Pretendard Medium" panose="02000603000000020004" pitchFamily="2" charset="-127"/>
+              <a:latin typeface="페이퍼로지 5 Medium" pitchFamily="2" charset="-127"/>
+              <a:ea typeface="페이퍼로지 5 Medium" pitchFamily="2" charset="-127"/>
               <a:cs typeface="Pretendard Medium" panose="02000603000000020004" pitchFamily="2" charset="-127"/>
             </a:endParaRPr>
           </a:p>
@@ -3673,7 +3943,7 @@
         </p:nvSpPr>
         <p:spPr>
           <a:xfrm>
-            <a:off x="1223010" y="6994800"/>
+            <a:off x="1223010" y="7853320"/>
             <a:ext cx="2558415" cy="306000"/>
           </a:xfrm>
           <a:prstGeom prst="rect">
@@ -3688,7 +3958,13 @@
         </p:spPr>
         <p:txBody>
           <a:bodyPr/>
-          <a:p/>
+          <a:lstStyle/>
+          <a:p>
+            <a:endParaRPr>
+              <a:latin typeface="페이퍼로지 5 Medium" pitchFamily="2" charset="-127"/>
+              <a:ea typeface="페이퍼로지 5 Medium" pitchFamily="2" charset="-127"/>
+            </a:endParaRPr>
+          </a:p>
         </p:txBody>
       </p:sp>
       <p:sp>
@@ -3699,7 +3975,7 @@
         </p:nvSpPr>
         <p:spPr>
           <a:xfrm>
-            <a:off x="1344930" y="7059600"/>
+            <a:off x="1344930" y="7918120"/>
             <a:ext cx="2391328" cy="223200"/>
           </a:xfrm>
           <a:prstGeom prst="rect">
@@ -3722,15 +3998,15 @@
                 <a:solidFill>
                   <a:srgbClr val="2B2B2B"/>
                 </a:solidFill>
-                <a:latin typeface="Pretendard Medium" panose="02000603000000020004" pitchFamily="2" charset="-127"/>
-                <a:ea typeface="Pretendard Medium" panose="02000603000000020004" pitchFamily="2" charset="-127"/>
+                <a:latin typeface="페이퍼로지 5 Medium" pitchFamily="2" charset="-127"/>
+                <a:ea typeface="페이퍼로지 5 Medium" pitchFamily="2" charset="-127"/>
                 <a:cs typeface="Pretendard Medium" panose="02000603000000020004" pitchFamily="2" charset="-127"/>
               </a:rPr>
               <a:t>{{진도_좌_3_내용}}</a:t>
             </a:r>
             <a:endParaRPr lang="en-US" sz="863" dirty="0">
-              <a:latin typeface="Pretendard Medium" panose="02000603000000020004" pitchFamily="2" charset="-127"/>
-              <a:ea typeface="Pretendard Medium" panose="02000603000000020004" pitchFamily="2" charset="-127"/>
+              <a:latin typeface="페이퍼로지 5 Medium" pitchFamily="2" charset="-127"/>
+              <a:ea typeface="페이퍼로지 5 Medium" pitchFamily="2" charset="-127"/>
               <a:cs typeface="Pretendard Medium" panose="02000603000000020004" pitchFamily="2" charset="-127"/>
             </a:endParaRPr>
           </a:p>
@@ -3744,7 +4020,7 @@
         </p:nvSpPr>
         <p:spPr>
           <a:xfrm>
-            <a:off x="3781425" y="6994800"/>
+            <a:off x="3781425" y="7853320"/>
             <a:ext cx="800100" cy="306000"/>
           </a:xfrm>
           <a:prstGeom prst="rect">
@@ -3759,7 +4035,13 @@
         </p:spPr>
         <p:txBody>
           <a:bodyPr/>
-          <a:p/>
+          <a:lstStyle/>
+          <a:p>
+            <a:endParaRPr>
+              <a:latin typeface="페이퍼로지 5 Medium" pitchFamily="2" charset="-127"/>
+              <a:ea typeface="페이퍼로지 5 Medium" pitchFamily="2" charset="-127"/>
+            </a:endParaRPr>
+          </a:p>
         </p:txBody>
       </p:sp>
       <p:sp>
@@ -3770,7 +4052,7 @@
         </p:nvSpPr>
         <p:spPr>
           <a:xfrm>
-            <a:off x="3903345" y="7059600"/>
+            <a:off x="3903345" y="7918120"/>
             <a:ext cx="632460" cy="223200"/>
           </a:xfrm>
           <a:prstGeom prst="rect">
@@ -3781,7 +4063,7 @@
         </p:spPr>
         <p:txBody>
           <a:bodyPr wrap="square" lIns="25400" tIns="25400" rIns="25400" bIns="25400" rtlCol="0" anchor="ctr">
-            <a:normAutofit lnSpcReduction="10000"/>
+            <a:normAutofit fontScale="85000" lnSpcReduction="20000"/>
           </a:bodyPr>
           <a:lstStyle/>
           <a:p>
@@ -3793,15 +4075,15 @@
                 <a:solidFill>
                   <a:srgbClr val="2B2B2B"/>
                 </a:solidFill>
-                <a:latin typeface="Pretendard Medium" panose="02000603000000020004" pitchFamily="2" charset="-127"/>
-                <a:ea typeface="Pretendard Medium" panose="02000603000000020004" pitchFamily="2" charset="-127"/>
+                <a:latin typeface="페이퍼로지 5 Medium" pitchFamily="2" charset="-127"/>
+                <a:ea typeface="페이퍼로지 5 Medium" pitchFamily="2" charset="-127"/>
                 <a:cs typeface="Pretendard Medium" panose="02000603000000020004" pitchFamily="2" charset="-127"/>
               </a:rPr>
               <a:t>{{진도_우_3_날짜}}</a:t>
             </a:r>
             <a:endParaRPr lang="en-US" sz="863" dirty="0">
-              <a:latin typeface="Pretendard Medium" panose="02000603000000020004" pitchFamily="2" charset="-127"/>
-              <a:ea typeface="Pretendard Medium" panose="02000603000000020004" pitchFamily="2" charset="-127"/>
+              <a:latin typeface="페이퍼로지 5 Medium" pitchFamily="2" charset="-127"/>
+              <a:ea typeface="페이퍼로지 5 Medium" pitchFamily="2" charset="-127"/>
               <a:cs typeface="Pretendard Medium" panose="02000603000000020004" pitchFamily="2" charset="-127"/>
             </a:endParaRPr>
           </a:p>
@@ -3815,7 +4097,7 @@
         </p:nvSpPr>
         <p:spPr>
           <a:xfrm>
-            <a:off x="4581525" y="6994800"/>
+            <a:off x="4581525" y="7853320"/>
             <a:ext cx="2558415" cy="306000"/>
           </a:xfrm>
           <a:prstGeom prst="rect">
@@ -3830,7 +4112,13 @@
         </p:spPr>
         <p:txBody>
           <a:bodyPr/>
-          <a:p/>
+          <a:lstStyle/>
+          <a:p>
+            <a:endParaRPr>
+              <a:latin typeface="페이퍼로지 5 Medium" pitchFamily="2" charset="-127"/>
+              <a:ea typeface="페이퍼로지 5 Medium" pitchFamily="2" charset="-127"/>
+            </a:endParaRPr>
+          </a:p>
         </p:txBody>
       </p:sp>
       <p:sp>
@@ -3841,7 +4129,7 @@
         </p:nvSpPr>
         <p:spPr>
           <a:xfrm>
-            <a:off x="4703445" y="7059600"/>
+            <a:off x="4703445" y="7918120"/>
             <a:ext cx="2391328" cy="223200"/>
           </a:xfrm>
           <a:prstGeom prst="rect">
@@ -3864,15 +4152,15 @@
                 <a:solidFill>
                   <a:srgbClr val="2B2B2B"/>
                 </a:solidFill>
-                <a:latin typeface="Pretendard Medium" panose="02000603000000020004" pitchFamily="2" charset="-127"/>
-                <a:ea typeface="Pretendard Medium" panose="02000603000000020004" pitchFamily="2" charset="-127"/>
+                <a:latin typeface="페이퍼로지 5 Medium" pitchFamily="2" charset="-127"/>
+                <a:ea typeface="페이퍼로지 5 Medium" pitchFamily="2" charset="-127"/>
                 <a:cs typeface="Pretendard Medium" panose="02000603000000020004" pitchFamily="2" charset="-127"/>
               </a:rPr>
               <a:t>{{진도_우_3_내용}}</a:t>
             </a:r>
             <a:endParaRPr lang="en-US" sz="863" dirty="0">
-              <a:latin typeface="Pretendard Medium" panose="02000603000000020004" pitchFamily="2" charset="-127"/>
-              <a:ea typeface="Pretendard Medium" panose="02000603000000020004" pitchFamily="2" charset="-127"/>
+              <a:latin typeface="페이퍼로지 5 Medium" pitchFamily="2" charset="-127"/>
+              <a:ea typeface="페이퍼로지 5 Medium" pitchFamily="2" charset="-127"/>
               <a:cs typeface="Pretendard Medium" panose="02000603000000020004" pitchFamily="2" charset="-127"/>
             </a:endParaRPr>
           </a:p>
@@ -3886,7 +4174,7 @@
         </p:nvSpPr>
         <p:spPr>
           <a:xfrm>
-            <a:off x="422910" y="7300800"/>
+            <a:off x="422910" y="8159320"/>
             <a:ext cx="800100" cy="306000"/>
           </a:xfrm>
           <a:prstGeom prst="rect">
@@ -3901,7 +4189,13 @@
         </p:spPr>
         <p:txBody>
           <a:bodyPr/>
-          <a:p/>
+          <a:lstStyle/>
+          <a:p>
+            <a:endParaRPr>
+              <a:latin typeface="페이퍼로지 5 Medium" pitchFamily="2" charset="-127"/>
+              <a:ea typeface="페이퍼로지 5 Medium" pitchFamily="2" charset="-127"/>
+            </a:endParaRPr>
+          </a:p>
         </p:txBody>
       </p:sp>
       <p:sp>
@@ -3912,7 +4206,7 @@
         </p:nvSpPr>
         <p:spPr>
           <a:xfrm>
-            <a:off x="544830" y="7365600"/>
+            <a:off x="544830" y="8224120"/>
             <a:ext cx="632460" cy="223200"/>
           </a:xfrm>
           <a:prstGeom prst="rect">
@@ -3923,7 +4217,7 @@
         </p:spPr>
         <p:txBody>
           <a:bodyPr wrap="square" lIns="25400" tIns="25400" rIns="25400" bIns="25400" rtlCol="0" anchor="ctr">
-            <a:normAutofit lnSpcReduction="10000"/>
+            <a:normAutofit fontScale="85000" lnSpcReduction="20000"/>
           </a:bodyPr>
           <a:lstStyle/>
           <a:p>
@@ -3935,15 +4229,15 @@
                 <a:solidFill>
                   <a:srgbClr val="2B2B2B"/>
                 </a:solidFill>
-                <a:latin typeface="Pretendard Medium" panose="02000603000000020004" pitchFamily="2" charset="-127"/>
-                <a:ea typeface="Pretendard Medium" panose="02000603000000020004" pitchFamily="2" charset="-127"/>
+                <a:latin typeface="페이퍼로지 5 Medium" pitchFamily="2" charset="-127"/>
+                <a:ea typeface="페이퍼로지 5 Medium" pitchFamily="2" charset="-127"/>
                 <a:cs typeface="Pretendard Medium" panose="02000603000000020004" pitchFamily="2" charset="-127"/>
               </a:rPr>
               <a:t>{{진도_좌_4_날짜}}</a:t>
             </a:r>
             <a:endParaRPr lang="en-US" sz="863" dirty="0">
-              <a:latin typeface="Pretendard Medium" panose="02000603000000020004" pitchFamily="2" charset="-127"/>
-              <a:ea typeface="Pretendard Medium" panose="02000603000000020004" pitchFamily="2" charset="-127"/>
+              <a:latin typeface="페이퍼로지 5 Medium" pitchFamily="2" charset="-127"/>
+              <a:ea typeface="페이퍼로지 5 Medium" pitchFamily="2" charset="-127"/>
               <a:cs typeface="Pretendard Medium" panose="02000603000000020004" pitchFamily="2" charset="-127"/>
             </a:endParaRPr>
           </a:p>
@@ -3957,7 +4251,7 @@
         </p:nvSpPr>
         <p:spPr>
           <a:xfrm>
-            <a:off x="1223010" y="7300800"/>
+            <a:off x="1223010" y="8159320"/>
             <a:ext cx="2558415" cy="306000"/>
           </a:xfrm>
           <a:prstGeom prst="rect">
@@ -3972,7 +4266,13 @@
         </p:spPr>
         <p:txBody>
           <a:bodyPr/>
-          <a:p/>
+          <a:lstStyle/>
+          <a:p>
+            <a:endParaRPr>
+              <a:latin typeface="페이퍼로지 5 Medium" pitchFamily="2" charset="-127"/>
+              <a:ea typeface="페이퍼로지 5 Medium" pitchFamily="2" charset="-127"/>
+            </a:endParaRPr>
+          </a:p>
         </p:txBody>
       </p:sp>
       <p:sp>
@@ -3983,7 +4283,7 @@
         </p:nvSpPr>
         <p:spPr>
           <a:xfrm>
-            <a:off x="1344930" y="7365600"/>
+            <a:off x="1344930" y="8224120"/>
             <a:ext cx="2391328" cy="223200"/>
           </a:xfrm>
           <a:prstGeom prst="rect">
@@ -4006,15 +4306,15 @@
                 <a:solidFill>
                   <a:srgbClr val="2B2B2B"/>
                 </a:solidFill>
-                <a:latin typeface="Pretendard Medium" panose="02000603000000020004" pitchFamily="2" charset="-127"/>
-                <a:ea typeface="Pretendard Medium" panose="02000603000000020004" pitchFamily="2" charset="-127"/>
+                <a:latin typeface="페이퍼로지 5 Medium" pitchFamily="2" charset="-127"/>
+                <a:ea typeface="페이퍼로지 5 Medium" pitchFamily="2" charset="-127"/>
                 <a:cs typeface="Pretendard Medium" panose="02000603000000020004" pitchFamily="2" charset="-127"/>
               </a:rPr>
               <a:t>{{진도_좌_4_내용}}</a:t>
             </a:r>
             <a:endParaRPr lang="en-US" sz="863" dirty="0">
-              <a:latin typeface="Pretendard Medium" panose="02000603000000020004" pitchFamily="2" charset="-127"/>
-              <a:ea typeface="Pretendard Medium" panose="02000603000000020004" pitchFamily="2" charset="-127"/>
+              <a:latin typeface="페이퍼로지 5 Medium" pitchFamily="2" charset="-127"/>
+              <a:ea typeface="페이퍼로지 5 Medium" pitchFamily="2" charset="-127"/>
               <a:cs typeface="Pretendard Medium" panose="02000603000000020004" pitchFamily="2" charset="-127"/>
             </a:endParaRPr>
           </a:p>
@@ -4028,7 +4328,7 @@
         </p:nvSpPr>
         <p:spPr>
           <a:xfrm>
-            <a:off x="3781425" y="7300800"/>
+            <a:off x="3781425" y="8159320"/>
             <a:ext cx="800100" cy="306000"/>
           </a:xfrm>
           <a:prstGeom prst="rect">
@@ -4043,7 +4343,13 @@
         </p:spPr>
         <p:txBody>
           <a:bodyPr/>
-          <a:p/>
+          <a:lstStyle/>
+          <a:p>
+            <a:endParaRPr>
+              <a:latin typeface="페이퍼로지 5 Medium" pitchFamily="2" charset="-127"/>
+              <a:ea typeface="페이퍼로지 5 Medium" pitchFamily="2" charset="-127"/>
+            </a:endParaRPr>
+          </a:p>
         </p:txBody>
       </p:sp>
       <p:sp>
@@ -4054,7 +4360,7 @@
         </p:nvSpPr>
         <p:spPr>
           <a:xfrm>
-            <a:off x="3903345" y="7365600"/>
+            <a:off x="3903345" y="8224120"/>
             <a:ext cx="632460" cy="223200"/>
           </a:xfrm>
           <a:prstGeom prst="rect">
@@ -4065,7 +4371,7 @@
         </p:spPr>
         <p:txBody>
           <a:bodyPr wrap="square" lIns="25400" tIns="25400" rIns="25400" bIns="25400" rtlCol="0" anchor="ctr">
-            <a:normAutofit lnSpcReduction="10000"/>
+            <a:normAutofit fontScale="85000" lnSpcReduction="20000"/>
           </a:bodyPr>
           <a:lstStyle/>
           <a:p>
@@ -4077,15 +4383,15 @@
                 <a:solidFill>
                   <a:srgbClr val="2B2B2B"/>
                 </a:solidFill>
-                <a:latin typeface="Pretendard Medium" panose="02000603000000020004" pitchFamily="2" charset="-127"/>
-                <a:ea typeface="Pretendard Medium" panose="02000603000000020004" pitchFamily="2" charset="-127"/>
+                <a:latin typeface="페이퍼로지 5 Medium" pitchFamily="2" charset="-127"/>
+                <a:ea typeface="페이퍼로지 5 Medium" pitchFamily="2" charset="-127"/>
                 <a:cs typeface="Pretendard Medium" panose="02000603000000020004" pitchFamily="2" charset="-127"/>
               </a:rPr>
               <a:t>{{진도_우_4_날짜}}</a:t>
             </a:r>
             <a:endParaRPr lang="en-US" sz="863" dirty="0">
-              <a:latin typeface="Pretendard Medium" panose="02000603000000020004" pitchFamily="2" charset="-127"/>
-              <a:ea typeface="Pretendard Medium" panose="02000603000000020004" pitchFamily="2" charset="-127"/>
+              <a:latin typeface="페이퍼로지 5 Medium" pitchFamily="2" charset="-127"/>
+              <a:ea typeface="페이퍼로지 5 Medium" pitchFamily="2" charset="-127"/>
               <a:cs typeface="Pretendard Medium" panose="02000603000000020004" pitchFamily="2" charset="-127"/>
             </a:endParaRPr>
           </a:p>
@@ -4099,7 +4405,7 @@
         </p:nvSpPr>
         <p:spPr>
           <a:xfrm>
-            <a:off x="4581525" y="7300800"/>
+            <a:off x="4581525" y="8159320"/>
             <a:ext cx="2558415" cy="306000"/>
           </a:xfrm>
           <a:prstGeom prst="rect">
@@ -4114,7 +4420,13 @@
         </p:spPr>
         <p:txBody>
           <a:bodyPr/>
-          <a:p/>
+          <a:lstStyle/>
+          <a:p>
+            <a:endParaRPr>
+              <a:latin typeface="페이퍼로지 5 Medium" pitchFamily="2" charset="-127"/>
+              <a:ea typeface="페이퍼로지 5 Medium" pitchFamily="2" charset="-127"/>
+            </a:endParaRPr>
+          </a:p>
         </p:txBody>
       </p:sp>
       <p:sp>
@@ -4125,7 +4437,7 @@
         </p:nvSpPr>
         <p:spPr>
           <a:xfrm>
-            <a:off x="4703445" y="7365600"/>
+            <a:off x="4703445" y="8224120"/>
             <a:ext cx="2391328" cy="223200"/>
           </a:xfrm>
           <a:prstGeom prst="rect">
@@ -4148,15 +4460,15 @@
                 <a:solidFill>
                   <a:srgbClr val="2B2B2B"/>
                 </a:solidFill>
-                <a:latin typeface="Pretendard Medium" panose="02000603000000020004" pitchFamily="2" charset="-127"/>
-                <a:ea typeface="Pretendard Medium" panose="02000603000000020004" pitchFamily="2" charset="-127"/>
+                <a:latin typeface="페이퍼로지 5 Medium" pitchFamily="2" charset="-127"/>
+                <a:ea typeface="페이퍼로지 5 Medium" pitchFamily="2" charset="-127"/>
                 <a:cs typeface="Pretendard Medium" panose="02000603000000020004" pitchFamily="2" charset="-127"/>
               </a:rPr>
               <a:t>{{진도_우_4_내용}}</a:t>
             </a:r>
             <a:endParaRPr lang="en-US" sz="863" dirty="0">
-              <a:latin typeface="Pretendard Medium" panose="02000603000000020004" pitchFamily="2" charset="-127"/>
-              <a:ea typeface="Pretendard Medium" panose="02000603000000020004" pitchFamily="2" charset="-127"/>
+              <a:latin typeface="페이퍼로지 5 Medium" pitchFamily="2" charset="-127"/>
+              <a:ea typeface="페이퍼로지 5 Medium" pitchFamily="2" charset="-127"/>
               <a:cs typeface="Pretendard Medium" panose="02000603000000020004" pitchFamily="2" charset="-127"/>
             </a:endParaRPr>
           </a:p>
@@ -4170,7 +4482,7 @@
         </p:nvSpPr>
         <p:spPr>
           <a:xfrm>
-            <a:off x="422910" y="7606800"/>
+            <a:off x="422910" y="8465320"/>
             <a:ext cx="800100" cy="306000"/>
           </a:xfrm>
           <a:prstGeom prst="rect">
@@ -4185,7 +4497,13 @@
         </p:spPr>
         <p:txBody>
           <a:bodyPr/>
-          <a:p/>
+          <a:lstStyle/>
+          <a:p>
+            <a:endParaRPr>
+              <a:latin typeface="페이퍼로지 5 Medium" pitchFamily="2" charset="-127"/>
+              <a:ea typeface="페이퍼로지 5 Medium" pitchFamily="2" charset="-127"/>
+            </a:endParaRPr>
+          </a:p>
         </p:txBody>
       </p:sp>
       <p:sp>
@@ -4196,7 +4514,7 @@
         </p:nvSpPr>
         <p:spPr>
           <a:xfrm>
-            <a:off x="544830" y="7671600"/>
+            <a:off x="544830" y="8530120"/>
             <a:ext cx="632460" cy="223200"/>
           </a:xfrm>
           <a:prstGeom prst="rect">
@@ -4207,7 +4525,7 @@
         </p:spPr>
         <p:txBody>
           <a:bodyPr wrap="square" lIns="25400" tIns="25400" rIns="25400" bIns="25400" rtlCol="0" anchor="ctr">
-            <a:normAutofit lnSpcReduction="10000"/>
+            <a:normAutofit fontScale="85000" lnSpcReduction="20000"/>
           </a:bodyPr>
           <a:lstStyle/>
           <a:p>
@@ -4219,15 +4537,15 @@
                 <a:solidFill>
                   <a:srgbClr val="2B2B2B"/>
                 </a:solidFill>
-                <a:latin typeface="Pretendard Medium" panose="02000603000000020004" pitchFamily="2" charset="-127"/>
-                <a:ea typeface="Pretendard Medium" panose="02000603000000020004" pitchFamily="2" charset="-127"/>
+                <a:latin typeface="페이퍼로지 5 Medium" pitchFamily="2" charset="-127"/>
+                <a:ea typeface="페이퍼로지 5 Medium" pitchFamily="2" charset="-127"/>
                 <a:cs typeface="Pretendard Medium" panose="02000603000000020004" pitchFamily="2" charset="-127"/>
               </a:rPr>
               <a:t>{{진도_좌_5_날짜}}</a:t>
             </a:r>
             <a:endParaRPr lang="en-US" sz="863" dirty="0">
-              <a:latin typeface="Pretendard Medium" panose="02000603000000020004" pitchFamily="2" charset="-127"/>
-              <a:ea typeface="Pretendard Medium" panose="02000603000000020004" pitchFamily="2" charset="-127"/>
+              <a:latin typeface="페이퍼로지 5 Medium" pitchFamily="2" charset="-127"/>
+              <a:ea typeface="페이퍼로지 5 Medium" pitchFamily="2" charset="-127"/>
               <a:cs typeface="Pretendard Medium" panose="02000603000000020004" pitchFamily="2" charset="-127"/>
             </a:endParaRPr>
           </a:p>
@@ -4241,7 +4559,7 @@
         </p:nvSpPr>
         <p:spPr>
           <a:xfrm>
-            <a:off x="1223010" y="7606800"/>
+            <a:off x="1223010" y="8465320"/>
             <a:ext cx="2558415" cy="306000"/>
           </a:xfrm>
           <a:prstGeom prst="rect">
@@ -4256,7 +4574,13 @@
         </p:spPr>
         <p:txBody>
           <a:bodyPr/>
-          <a:p/>
+          <a:lstStyle/>
+          <a:p>
+            <a:endParaRPr>
+              <a:latin typeface="페이퍼로지 5 Medium" pitchFamily="2" charset="-127"/>
+              <a:ea typeface="페이퍼로지 5 Medium" pitchFamily="2" charset="-127"/>
+            </a:endParaRPr>
+          </a:p>
         </p:txBody>
       </p:sp>
       <p:sp>
@@ -4267,7 +4591,7 @@
         </p:nvSpPr>
         <p:spPr>
           <a:xfrm>
-            <a:off x="1344930" y="7671600"/>
+            <a:off x="1344930" y="8530120"/>
             <a:ext cx="2391328" cy="223200"/>
           </a:xfrm>
           <a:prstGeom prst="rect">
@@ -4290,15 +4614,15 @@
                 <a:solidFill>
                   <a:srgbClr val="2B2B2B"/>
                 </a:solidFill>
-                <a:latin typeface="Pretendard Medium" panose="02000603000000020004" pitchFamily="2" charset="-127"/>
-                <a:ea typeface="Pretendard Medium" panose="02000603000000020004" pitchFamily="2" charset="-127"/>
+                <a:latin typeface="페이퍼로지 5 Medium" pitchFamily="2" charset="-127"/>
+                <a:ea typeface="페이퍼로지 5 Medium" pitchFamily="2" charset="-127"/>
                 <a:cs typeface="Pretendard Medium" panose="02000603000000020004" pitchFamily="2" charset="-127"/>
               </a:rPr>
               <a:t>{{진도_좌_5_내용}}</a:t>
             </a:r>
             <a:endParaRPr lang="en-US" sz="863" dirty="0">
-              <a:latin typeface="Pretendard Medium" panose="02000603000000020004" pitchFamily="2" charset="-127"/>
-              <a:ea typeface="Pretendard Medium" panose="02000603000000020004" pitchFamily="2" charset="-127"/>
+              <a:latin typeface="페이퍼로지 5 Medium" pitchFamily="2" charset="-127"/>
+              <a:ea typeface="페이퍼로지 5 Medium" pitchFamily="2" charset="-127"/>
               <a:cs typeface="Pretendard Medium" panose="02000603000000020004" pitchFamily="2" charset="-127"/>
             </a:endParaRPr>
           </a:p>
@@ -4312,7 +4636,7 @@
         </p:nvSpPr>
         <p:spPr>
           <a:xfrm>
-            <a:off x="3781425" y="7606800"/>
+            <a:off x="3781425" y="8465320"/>
             <a:ext cx="800100" cy="306000"/>
           </a:xfrm>
           <a:prstGeom prst="rect">
@@ -4327,7 +4651,13 @@
         </p:spPr>
         <p:txBody>
           <a:bodyPr/>
-          <a:p/>
+          <a:lstStyle/>
+          <a:p>
+            <a:endParaRPr>
+              <a:latin typeface="페이퍼로지 5 Medium" pitchFamily="2" charset="-127"/>
+              <a:ea typeface="페이퍼로지 5 Medium" pitchFamily="2" charset="-127"/>
+            </a:endParaRPr>
+          </a:p>
         </p:txBody>
       </p:sp>
       <p:sp>
@@ -4338,7 +4668,7 @@
         </p:nvSpPr>
         <p:spPr>
           <a:xfrm>
-            <a:off x="3903345" y="7671600"/>
+            <a:off x="3903345" y="8530120"/>
             <a:ext cx="632460" cy="223200"/>
           </a:xfrm>
           <a:prstGeom prst="rect">
@@ -4349,7 +4679,7 @@
         </p:spPr>
         <p:txBody>
           <a:bodyPr wrap="square" lIns="25400" tIns="25400" rIns="25400" bIns="25400" rtlCol="0" anchor="ctr">
-            <a:normAutofit lnSpcReduction="10000"/>
+            <a:normAutofit fontScale="85000" lnSpcReduction="20000"/>
           </a:bodyPr>
           <a:lstStyle/>
           <a:p>
@@ -4361,15 +4691,15 @@
                 <a:solidFill>
                   <a:srgbClr val="2B2B2B"/>
                 </a:solidFill>
-                <a:latin typeface="Pretendard Medium" panose="02000603000000020004" pitchFamily="2" charset="-127"/>
-                <a:ea typeface="Pretendard Medium" panose="02000603000000020004" pitchFamily="2" charset="-127"/>
+                <a:latin typeface="페이퍼로지 5 Medium" pitchFamily="2" charset="-127"/>
+                <a:ea typeface="페이퍼로지 5 Medium" pitchFamily="2" charset="-127"/>
                 <a:cs typeface="Pretendard Medium" panose="02000603000000020004" pitchFamily="2" charset="-127"/>
               </a:rPr>
               <a:t>{{진도_우_5_날짜}}</a:t>
             </a:r>
             <a:endParaRPr lang="en-US" sz="863" dirty="0">
-              <a:latin typeface="Pretendard Medium" panose="02000603000000020004" pitchFamily="2" charset="-127"/>
-              <a:ea typeface="Pretendard Medium" panose="02000603000000020004" pitchFamily="2" charset="-127"/>
+              <a:latin typeface="페이퍼로지 5 Medium" pitchFamily="2" charset="-127"/>
+              <a:ea typeface="페이퍼로지 5 Medium" pitchFamily="2" charset="-127"/>
               <a:cs typeface="Pretendard Medium" panose="02000603000000020004" pitchFamily="2" charset="-127"/>
             </a:endParaRPr>
           </a:p>
@@ -4383,7 +4713,7 @@
         </p:nvSpPr>
         <p:spPr>
           <a:xfrm>
-            <a:off x="4581525" y="7606800"/>
+            <a:off x="4581525" y="8465320"/>
             <a:ext cx="2558415" cy="306000"/>
           </a:xfrm>
           <a:prstGeom prst="rect">
@@ -4398,7 +4728,13 @@
         </p:spPr>
         <p:txBody>
           <a:bodyPr/>
-          <a:p/>
+          <a:lstStyle/>
+          <a:p>
+            <a:endParaRPr>
+              <a:latin typeface="페이퍼로지 5 Medium" pitchFamily="2" charset="-127"/>
+              <a:ea typeface="페이퍼로지 5 Medium" pitchFamily="2" charset="-127"/>
+            </a:endParaRPr>
+          </a:p>
         </p:txBody>
       </p:sp>
       <p:sp>
@@ -4409,7 +4745,7 @@
         </p:nvSpPr>
         <p:spPr>
           <a:xfrm>
-            <a:off x="4703445" y="7671600"/>
+            <a:off x="4703445" y="8530120"/>
             <a:ext cx="2391328" cy="223200"/>
           </a:xfrm>
           <a:prstGeom prst="rect">
@@ -4432,15 +4768,15 @@
                 <a:solidFill>
                   <a:srgbClr val="2B2B2B"/>
                 </a:solidFill>
-                <a:latin typeface="Pretendard Medium" panose="02000603000000020004" pitchFamily="2" charset="-127"/>
-                <a:ea typeface="Pretendard Medium" panose="02000603000000020004" pitchFamily="2" charset="-127"/>
+                <a:latin typeface="페이퍼로지 5 Medium" pitchFamily="2" charset="-127"/>
+                <a:ea typeface="페이퍼로지 5 Medium" pitchFamily="2" charset="-127"/>
                 <a:cs typeface="Pretendard Medium" panose="02000603000000020004" pitchFamily="2" charset="-127"/>
               </a:rPr>
               <a:t>{{진도_우_5_내용}}</a:t>
             </a:r>
             <a:endParaRPr lang="en-US" sz="863" dirty="0">
-              <a:latin typeface="Pretendard Medium" panose="02000603000000020004" pitchFamily="2" charset="-127"/>
-              <a:ea typeface="Pretendard Medium" panose="02000603000000020004" pitchFamily="2" charset="-127"/>
+              <a:latin typeface="페이퍼로지 5 Medium" pitchFamily="2" charset="-127"/>
+              <a:ea typeface="페이퍼로지 5 Medium" pitchFamily="2" charset="-127"/>
               <a:cs typeface="Pretendard Medium" panose="02000603000000020004" pitchFamily="2" charset="-127"/>
             </a:endParaRPr>
           </a:p>
@@ -4469,7 +4805,13 @@
         </p:spPr>
         <p:txBody>
           <a:bodyPr/>
-          <a:p/>
+          <a:lstStyle/>
+          <a:p>
+            <a:endParaRPr>
+              <a:latin typeface="페이퍼로지 5 Medium" pitchFamily="2" charset="-127"/>
+              <a:ea typeface="페이퍼로지 5 Medium" pitchFamily="2" charset="-127"/>
+            </a:endParaRPr>
+          </a:p>
         </p:txBody>
       </p:sp>
       <p:sp>
@@ -4506,15 +4848,15 @@
                 <a:solidFill>
                   <a:srgbClr val="4A4A4A"/>
                 </a:solidFill>
-                <a:latin typeface="Pretendard Medium" panose="02000603000000020004" pitchFamily="2" charset="-127"/>
-                <a:ea typeface="Pretendard Medium" panose="02000603000000020004" pitchFamily="2" charset="-127"/>
+                <a:latin typeface="페이퍼로지 5 Medium" pitchFamily="2" charset="-127"/>
+                <a:ea typeface="페이퍼로지 5 Medium" pitchFamily="2" charset="-127"/>
                 <a:cs typeface="Pretendard Medium" panose="02000603000000020004" pitchFamily="2" charset="-127"/>
               </a:rPr>
               <a:t>{{강의형태}}</a:t>
             </a:r>
             <a:endParaRPr lang="en-US" sz="975" dirty="0">
-              <a:latin typeface="Pretendard Medium" panose="02000603000000020004" pitchFamily="2" charset="-127"/>
-              <a:ea typeface="Pretendard Medium" panose="02000603000000020004" pitchFamily="2" charset="-127"/>
+              <a:latin typeface="페이퍼로지 5 Medium" pitchFamily="2" charset="-127"/>
+              <a:ea typeface="페이퍼로지 5 Medium" pitchFamily="2" charset="-127"/>
               <a:cs typeface="Pretendard Medium" panose="02000603000000020004" pitchFamily="2" charset="-127"/>
             </a:endParaRPr>
           </a:p>
@@ -4543,7 +4885,13 @@
         </p:spPr>
         <p:txBody>
           <a:bodyPr/>
-          <a:p/>
+          <a:lstStyle/>
+          <a:p>
+            <a:endParaRPr>
+              <a:latin typeface="페이퍼로지 5 Medium" pitchFamily="2" charset="-127"/>
+              <a:ea typeface="페이퍼로지 5 Medium" pitchFamily="2" charset="-127"/>
+            </a:endParaRPr>
+          </a:p>
         </p:txBody>
       </p:sp>
       <p:sp>
@@ -4577,15 +4925,15 @@
                 <a:solidFill>
                   <a:srgbClr val="161616"/>
                 </a:solidFill>
-                <a:latin typeface="Pretendard Medium" panose="02000603000000020004" pitchFamily="2" charset="-127"/>
-                <a:ea typeface="Pretendard Medium" panose="02000603000000020004" pitchFamily="2" charset="-127"/>
+                <a:latin typeface="페이퍼로지 5 Medium" pitchFamily="2" charset="-127"/>
+                <a:ea typeface="페이퍼로지 5 Medium" pitchFamily="2" charset="-127"/>
                 <a:cs typeface="Pretendard Medium" panose="02000603000000020004" pitchFamily="2" charset="-127"/>
               </a:rPr>
               <a:t>교재 안내</a:t>
             </a:r>
             <a:endParaRPr lang="en-US" sz="1200" dirty="0">
-              <a:latin typeface="Pretendard Medium" panose="02000603000000020004" pitchFamily="2" charset="-127"/>
-              <a:ea typeface="Pretendard Medium" panose="02000603000000020004" pitchFamily="2" charset="-127"/>
+              <a:latin typeface="페이퍼로지 5 Medium" pitchFamily="2" charset="-127"/>
+              <a:ea typeface="페이퍼로지 5 Medium" pitchFamily="2" charset="-127"/>
               <a:cs typeface="Pretendard Medium" panose="02000603000000020004" pitchFamily="2" charset="-127"/>
             </a:endParaRPr>
           </a:p>
@@ -4600,7 +4948,7 @@
         <p:spPr>
           <a:xfrm>
             <a:off x="417600" y="5148000"/>
-            <a:ext cx="3362400" cy="568800"/>
+            <a:ext cx="3362400" cy="1156968"/>
           </a:xfrm>
           <a:prstGeom prst="rect">
             <a:avLst/>
@@ -4614,7 +4962,13 @@
         </p:spPr>
         <p:txBody>
           <a:bodyPr/>
-          <a:p/>
+          <a:lstStyle/>
+          <a:p>
+            <a:endParaRPr>
+              <a:latin typeface="페이퍼로지 5 Medium" pitchFamily="2" charset="-127"/>
+              <a:ea typeface="페이퍼로지 5 Medium" pitchFamily="2" charset="-127"/>
+            </a:endParaRPr>
+          </a:p>
         </p:txBody>
       </p:sp>
       <p:sp>
@@ -4625,7 +4979,7 @@
         </p:nvSpPr>
         <p:spPr>
           <a:xfrm>
-            <a:off x="561600" y="5176800"/>
+            <a:off x="561600" y="5435880"/>
             <a:ext cx="3074400" cy="522000"/>
           </a:xfrm>
           <a:prstGeom prst="rect">
@@ -4636,7 +4990,7 @@
         </p:spPr>
         <p:txBody>
           <a:bodyPr wrap="square" lIns="25400" tIns="25400" rIns="25400" bIns="25400" rtlCol="0" anchor="ctr">
-            <a:normAutofit fontScale="92500" lnSpcReduction="20000"/>
+            <a:noAutofit/>
           </a:bodyPr>
           <a:lstStyle/>
           <a:p>
@@ -4651,12 +5005,48 @@
               <a:defRPr sz="1000"/>
             </a:pPr>
             <a:r>
-              <a:rPr sz="938" b="1"/>
-              <a:t>교재 결제 방법</a:t>
-            </a:r>
-            <a:endParaRPr lang="en-US" sz="863" dirty="0">
-              <a:latin typeface="Pretendard Medium" panose="02000603000000020004" pitchFamily="2" charset="-127"/>
-              <a:ea typeface="Pretendard Medium" panose="02000603000000020004" pitchFamily="2" charset="-127"/>
+              <a:rPr sz="900" b="1" dirty="0" err="1">
+                <a:latin typeface="페이퍼로지 5 Medium" pitchFamily="2" charset="-127"/>
+                <a:ea typeface="페이퍼로지 5 Medium" pitchFamily="2" charset="-127"/>
+                <a:cs typeface="Pretendard Medium" panose="02000603000000020004" pitchFamily="2" charset="-127"/>
+              </a:rPr>
+              <a:t>교재</a:t>
+            </a:r>
+            <a:r>
+              <a:rPr sz="900" b="1" dirty="0">
+                <a:latin typeface="페이퍼로지 5 Medium" pitchFamily="2" charset="-127"/>
+                <a:ea typeface="페이퍼로지 5 Medium" pitchFamily="2" charset="-127"/>
+                <a:cs typeface="Pretendard Medium" panose="02000603000000020004" pitchFamily="2" charset="-127"/>
+              </a:rPr>
+              <a:t> </a:t>
+            </a:r>
+            <a:r>
+              <a:rPr sz="900" b="1" dirty="0" err="1">
+                <a:latin typeface="페이퍼로지 5 Medium" pitchFamily="2" charset="-127"/>
+                <a:ea typeface="페이퍼로지 5 Medium" pitchFamily="2" charset="-127"/>
+                <a:cs typeface="Pretendard Medium" panose="02000603000000020004" pitchFamily="2" charset="-127"/>
+              </a:rPr>
+              <a:t>결제</a:t>
+            </a:r>
+            <a:r>
+              <a:rPr sz="900" b="1" dirty="0">
+                <a:latin typeface="페이퍼로지 5 Medium" pitchFamily="2" charset="-127"/>
+                <a:ea typeface="페이퍼로지 5 Medium" pitchFamily="2" charset="-127"/>
+                <a:cs typeface="Pretendard Medium" panose="02000603000000020004" pitchFamily="2" charset="-127"/>
+              </a:rPr>
+              <a:t> </a:t>
+            </a:r>
+            <a:r>
+              <a:rPr sz="900" b="1" dirty="0" err="1">
+                <a:latin typeface="페이퍼로지 5 Medium" pitchFamily="2" charset="-127"/>
+                <a:ea typeface="페이퍼로지 5 Medium" pitchFamily="2" charset="-127"/>
+                <a:cs typeface="Pretendard Medium" panose="02000603000000020004" pitchFamily="2" charset="-127"/>
+              </a:rPr>
+              <a:t>방법</a:t>
+            </a:r>
+            <a:endParaRPr lang="en-US" sz="900" dirty="0">
+              <a:latin typeface="페이퍼로지 5 Medium" pitchFamily="2" charset="-127"/>
+              <a:ea typeface="페이퍼로지 5 Medium" pitchFamily="2" charset="-127"/>
               <a:cs typeface="Pretendard Medium" panose="02000603000000020004" pitchFamily="2" charset="-127"/>
             </a:endParaRPr>
           </a:p>
@@ -4667,9 +5057,66 @@
               </a:lnSpc>
             </a:pPr>
             <a:r>
-              <a:rPr sz="1000"/>
-              <a:t>샘플학원 홈페이지 학생 ID 로그인</a:t>
-            </a:r>
+              <a:rPr sz="900" dirty="0" err="1">
+                <a:latin typeface="페이퍼로지 5 Medium" pitchFamily="2" charset="-127"/>
+                <a:ea typeface="페이퍼로지 5 Medium" pitchFamily="2" charset="-127"/>
+                <a:cs typeface="Pretendard Medium" panose="02000603000000020004" pitchFamily="2" charset="-127"/>
+              </a:rPr>
+              <a:t>샘플학원</a:t>
+            </a:r>
+            <a:r>
+              <a:rPr sz="900" dirty="0">
+                <a:latin typeface="페이퍼로지 5 Medium" pitchFamily="2" charset="-127"/>
+                <a:ea typeface="페이퍼로지 5 Medium" pitchFamily="2" charset="-127"/>
+                <a:cs typeface="Pretendard Medium" panose="02000603000000020004" pitchFamily="2" charset="-127"/>
+              </a:rPr>
+              <a:t> </a:t>
+            </a:r>
+            <a:r>
+              <a:rPr sz="900" dirty="0" err="1">
+                <a:latin typeface="페이퍼로지 5 Medium" pitchFamily="2" charset="-127"/>
+                <a:ea typeface="페이퍼로지 5 Medium" pitchFamily="2" charset="-127"/>
+                <a:cs typeface="Pretendard Medium" panose="02000603000000020004" pitchFamily="2" charset="-127"/>
+              </a:rPr>
+              <a:t>홈페이지</a:t>
+            </a:r>
+            <a:r>
+              <a:rPr sz="900" dirty="0">
+                <a:latin typeface="페이퍼로지 5 Medium" pitchFamily="2" charset="-127"/>
+                <a:ea typeface="페이퍼로지 5 Medium" pitchFamily="2" charset="-127"/>
+                <a:cs typeface="Pretendard Medium" panose="02000603000000020004" pitchFamily="2" charset="-127"/>
+              </a:rPr>
+              <a:t> </a:t>
+            </a:r>
+            <a:r>
+              <a:rPr sz="900" dirty="0" err="1">
+                <a:latin typeface="페이퍼로지 5 Medium" pitchFamily="2" charset="-127"/>
+                <a:ea typeface="페이퍼로지 5 Medium" pitchFamily="2" charset="-127"/>
+                <a:cs typeface="Pretendard Medium" panose="02000603000000020004" pitchFamily="2" charset="-127"/>
+              </a:rPr>
+              <a:t>학생</a:t>
+            </a:r>
+            <a:r>
+              <a:rPr sz="900" dirty="0">
+                <a:latin typeface="페이퍼로지 5 Medium" pitchFamily="2" charset="-127"/>
+                <a:ea typeface="페이퍼로지 5 Medium" pitchFamily="2" charset="-127"/>
+                <a:cs typeface="Pretendard Medium" panose="02000603000000020004" pitchFamily="2" charset="-127"/>
+              </a:rPr>
+              <a:t> ID </a:t>
+            </a:r>
+            <a:r>
+              <a:rPr sz="900" dirty="0" err="1">
+                <a:latin typeface="페이퍼로지 5 Medium" pitchFamily="2" charset="-127"/>
+                <a:ea typeface="페이퍼로지 5 Medium" pitchFamily="2" charset="-127"/>
+                <a:cs typeface="Pretendard Medium" panose="02000603000000020004" pitchFamily="2" charset="-127"/>
+              </a:rPr>
+              <a:t>로그인</a:t>
+            </a:r>
+            <a:endParaRPr sz="900" dirty="0">
+              <a:latin typeface="페이퍼로지 5 Medium" pitchFamily="2" charset="-127"/>
+              <a:ea typeface="페이퍼로지 5 Medium" pitchFamily="2" charset="-127"/>
+              <a:cs typeface="Pretendard Medium" panose="02000603000000020004" pitchFamily="2" charset="-127"/>
+            </a:endParaRPr>
           </a:p>
           <a:p>
             <a:pPr>
@@ -4678,9 +5125,74 @@
               </a:lnSpc>
             </a:pPr>
             <a:r>
-              <a:rPr sz="1000"/>
-              <a:t>→ 마이페이지 → 마이샘플사이트 → 교재 구매</a:t>
-            </a:r>
+              <a:rPr sz="900" dirty="0">
+                <a:latin typeface="페이퍼로지 5 Medium" pitchFamily="2" charset="-127"/>
+                <a:ea typeface="페이퍼로지 5 Medium" pitchFamily="2" charset="-127"/>
+                <a:cs typeface="Pretendard Medium" panose="02000603000000020004" pitchFamily="2" charset="-127"/>
+              </a:rPr>
+              <a:t>→ </a:t>
+            </a:r>
+            <a:r>
+              <a:rPr sz="900" dirty="0" err="1">
+                <a:latin typeface="페이퍼로지 5 Medium" pitchFamily="2" charset="-127"/>
+                <a:ea typeface="페이퍼로지 5 Medium" pitchFamily="2" charset="-127"/>
+                <a:cs typeface="Pretendard Medium" panose="02000603000000020004" pitchFamily="2" charset="-127"/>
+              </a:rPr>
+              <a:t>마이페이지</a:t>
+            </a:r>
+            <a:r>
+              <a:rPr sz="900" dirty="0">
+                <a:latin typeface="페이퍼로지 5 Medium" pitchFamily="2" charset="-127"/>
+                <a:ea typeface="페이퍼로지 5 Medium" pitchFamily="2" charset="-127"/>
+                <a:cs typeface="Pretendard Medium" panose="02000603000000020004" pitchFamily="2" charset="-127"/>
+              </a:rPr>
+              <a:t> → </a:t>
+            </a:r>
+            <a:r>
+              <a:rPr sz="900" dirty="0" err="1">
+                <a:latin typeface="페이퍼로지 5 Medium" pitchFamily="2" charset="-127"/>
+                <a:ea typeface="페이퍼로지 5 Medium" pitchFamily="2" charset="-127"/>
+                <a:cs typeface="Pretendard Medium" panose="02000603000000020004" pitchFamily="2" charset="-127"/>
+              </a:rPr>
+              <a:t>마이샘플사이트</a:t>
+            </a:r>
+            <a:r>
+              <a:rPr sz="900" dirty="0">
+                <a:latin typeface="페이퍼로지 5 Medium" pitchFamily="2" charset="-127"/>
+                <a:ea typeface="페이퍼로지 5 Medium" pitchFamily="2" charset="-127"/>
+                <a:cs typeface="Pretendard Medium" panose="02000603000000020004" pitchFamily="2" charset="-127"/>
+              </a:rPr>
+              <a:t> → </a:t>
+            </a:r>
+            <a:r>
+              <a:rPr sz="900" dirty="0" err="1">
+                <a:latin typeface="페이퍼로지 5 Medium" pitchFamily="2" charset="-127"/>
+                <a:ea typeface="페이퍼로지 5 Medium" pitchFamily="2" charset="-127"/>
+                <a:cs typeface="Pretendard Medium" panose="02000603000000020004" pitchFamily="2" charset="-127"/>
+              </a:rPr>
+              <a:t>교재</a:t>
+            </a:r>
+            <a:r>
+              <a:rPr sz="900" dirty="0">
+                <a:latin typeface="페이퍼로지 5 Medium" pitchFamily="2" charset="-127"/>
+                <a:ea typeface="페이퍼로지 5 Medium" pitchFamily="2" charset="-127"/>
+                <a:cs typeface="Pretendard Medium" panose="02000603000000020004" pitchFamily="2" charset="-127"/>
+              </a:rPr>
+              <a:t> </a:t>
+            </a:r>
+            <a:r>
+              <a:rPr sz="900" dirty="0" err="1">
+                <a:latin typeface="페이퍼로지 5 Medium" pitchFamily="2" charset="-127"/>
+                <a:ea typeface="페이퍼로지 5 Medium" pitchFamily="2" charset="-127"/>
+                <a:cs typeface="Pretendard Medium" panose="02000603000000020004" pitchFamily="2" charset="-127"/>
+              </a:rPr>
+              <a:t>구매</a:t>
+            </a:r>
+            <a:endParaRPr sz="900" dirty="0">
+              <a:latin typeface="페이퍼로지 5 Medium" pitchFamily="2" charset="-127"/>
+              <a:ea typeface="페이퍼로지 5 Medium" pitchFamily="2" charset="-127"/>
+              <a:cs typeface="Pretendard Medium" panose="02000603000000020004" pitchFamily="2" charset="-127"/>
+            </a:endParaRPr>
           </a:p>
           <a:p>
             <a:pPr>
@@ -4689,9 +5201,122 @@
               </a:lnSpc>
             </a:pPr>
             <a:r>
-              <a:rPr sz="1000"/>
-              <a:t>※ 결제 확인 후 수령 가능   ※ 재원생 인증 필수</a:t>
-            </a:r>
+              <a:rPr sz="900" dirty="0">
+                <a:latin typeface="페이퍼로지 5 Medium" pitchFamily="2" charset="-127"/>
+                <a:ea typeface="페이퍼로지 5 Medium" pitchFamily="2" charset="-127"/>
+                <a:cs typeface="Pretendard Medium" panose="02000603000000020004" pitchFamily="2" charset="-127"/>
+              </a:rPr>
+              <a:t>※ </a:t>
+            </a:r>
+            <a:r>
+              <a:rPr sz="900" dirty="0" err="1">
+                <a:latin typeface="페이퍼로지 5 Medium" pitchFamily="2" charset="-127"/>
+                <a:ea typeface="페이퍼로지 5 Medium" pitchFamily="2" charset="-127"/>
+                <a:cs typeface="Pretendard Medium" panose="02000603000000020004" pitchFamily="2" charset="-127"/>
+              </a:rPr>
+              <a:t>결제</a:t>
+            </a:r>
+            <a:r>
+              <a:rPr sz="900" dirty="0">
+                <a:latin typeface="페이퍼로지 5 Medium" pitchFamily="2" charset="-127"/>
+                <a:ea typeface="페이퍼로지 5 Medium" pitchFamily="2" charset="-127"/>
+                <a:cs typeface="Pretendard Medium" panose="02000603000000020004" pitchFamily="2" charset="-127"/>
+              </a:rPr>
+              <a:t> </a:t>
+            </a:r>
+            <a:r>
+              <a:rPr sz="900" dirty="0" err="1">
+                <a:latin typeface="페이퍼로지 5 Medium" pitchFamily="2" charset="-127"/>
+                <a:ea typeface="페이퍼로지 5 Medium" pitchFamily="2" charset="-127"/>
+                <a:cs typeface="Pretendard Medium" panose="02000603000000020004" pitchFamily="2" charset="-127"/>
+              </a:rPr>
+              <a:t>확인</a:t>
+            </a:r>
+            <a:r>
+              <a:rPr sz="900" dirty="0">
+                <a:latin typeface="페이퍼로지 5 Medium" pitchFamily="2" charset="-127"/>
+                <a:ea typeface="페이퍼로지 5 Medium" pitchFamily="2" charset="-127"/>
+                <a:cs typeface="Pretendard Medium" panose="02000603000000020004" pitchFamily="2" charset="-127"/>
+              </a:rPr>
+              <a:t> 후 </a:t>
+            </a:r>
+            <a:r>
+              <a:rPr sz="900" dirty="0" err="1">
+                <a:latin typeface="페이퍼로지 5 Medium" pitchFamily="2" charset="-127"/>
+                <a:ea typeface="페이퍼로지 5 Medium" pitchFamily="2" charset="-127"/>
+                <a:cs typeface="Pretendard Medium" panose="02000603000000020004" pitchFamily="2" charset="-127"/>
+              </a:rPr>
+              <a:t>수령</a:t>
+            </a:r>
+            <a:r>
+              <a:rPr sz="900" dirty="0">
+                <a:latin typeface="페이퍼로지 5 Medium" pitchFamily="2" charset="-127"/>
+                <a:ea typeface="페이퍼로지 5 Medium" pitchFamily="2" charset="-127"/>
+                <a:cs typeface="Pretendard Medium" panose="02000603000000020004" pitchFamily="2" charset="-127"/>
+              </a:rPr>
+              <a:t> </a:t>
+            </a:r>
+            <a:r>
+              <a:rPr sz="900" dirty="0" err="1">
+                <a:latin typeface="페이퍼로지 5 Medium" pitchFamily="2" charset="-127"/>
+                <a:ea typeface="페이퍼로지 5 Medium" pitchFamily="2" charset="-127"/>
+                <a:cs typeface="Pretendard Medium" panose="02000603000000020004" pitchFamily="2" charset="-127"/>
+              </a:rPr>
+              <a:t>가능</a:t>
+            </a:r>
+            <a:r>
+              <a:rPr sz="900" dirty="0">
+                <a:latin typeface="페이퍼로지 5 Medium" pitchFamily="2" charset="-127"/>
+                <a:ea typeface="페이퍼로지 5 Medium" pitchFamily="2" charset="-127"/>
+                <a:cs typeface="Pretendard Medium" panose="02000603000000020004" pitchFamily="2" charset="-127"/>
+              </a:rPr>
+              <a:t>   ※ </a:t>
+            </a:r>
+            <a:r>
+              <a:rPr sz="900" dirty="0" err="1">
+                <a:latin typeface="페이퍼로지 5 Medium" pitchFamily="2" charset="-127"/>
+                <a:ea typeface="페이퍼로지 5 Medium" pitchFamily="2" charset="-127"/>
+                <a:cs typeface="Pretendard Medium" panose="02000603000000020004" pitchFamily="2" charset="-127"/>
+              </a:rPr>
+              <a:t>재원생</a:t>
+            </a:r>
+            <a:r>
+              <a:rPr sz="900" dirty="0">
+                <a:latin typeface="페이퍼로지 5 Medium" pitchFamily="2" charset="-127"/>
+                <a:ea typeface="페이퍼로지 5 Medium" pitchFamily="2" charset="-127"/>
+                <a:cs typeface="Pretendard Medium" panose="02000603000000020004" pitchFamily="2" charset="-127"/>
+              </a:rPr>
+              <a:t> </a:t>
+            </a:r>
+            <a:r>
+              <a:rPr sz="900" dirty="0" err="1">
+                <a:latin typeface="페이퍼로지 5 Medium" pitchFamily="2" charset="-127"/>
+                <a:ea typeface="페이퍼로지 5 Medium" pitchFamily="2" charset="-127"/>
+                <a:cs typeface="Pretendard Medium" panose="02000603000000020004" pitchFamily="2" charset="-127"/>
+              </a:rPr>
+              <a:t>인증</a:t>
+            </a:r>
+            <a:r>
+              <a:rPr sz="900" dirty="0">
+                <a:latin typeface="페이퍼로지 5 Medium" pitchFamily="2" charset="-127"/>
+                <a:ea typeface="페이퍼로지 5 Medium" pitchFamily="2" charset="-127"/>
+                <a:cs typeface="Pretendard Medium" panose="02000603000000020004" pitchFamily="2" charset="-127"/>
+              </a:rPr>
+              <a:t> </a:t>
+            </a:r>
+            <a:r>
+              <a:rPr sz="900" dirty="0" err="1">
+                <a:latin typeface="페이퍼로지 5 Medium" pitchFamily="2" charset="-127"/>
+                <a:ea typeface="페이퍼로지 5 Medium" pitchFamily="2" charset="-127"/>
+                <a:cs typeface="Pretendard Medium" panose="02000603000000020004" pitchFamily="2" charset="-127"/>
+              </a:rPr>
+              <a:t>필수</a:t>
+            </a:r>
+            <a:endParaRPr sz="900" dirty="0">
+              <a:latin typeface="페이퍼로지 5 Medium" pitchFamily="2" charset="-127"/>
+              <a:ea typeface="페이퍼로지 5 Medium" pitchFamily="2" charset="-127"/>
+              <a:cs typeface="Pretendard Medium" panose="02000603000000020004" pitchFamily="2" charset="-127"/>
+            </a:endParaRPr>
           </a:p>
           <a:p>
             <a:pPr>
@@ -4700,8 +5325,108 @@
               </a:lnSpc>
             </a:pPr>
             <a:r>
-              <a:rPr sz="1000"/>
-              <a:t>※ 현장 결제 불가 (온라인 결제만 가능)</a:t>
+              <a:rPr sz="900" dirty="0">
+                <a:latin typeface="페이퍼로지 5 Medium" pitchFamily="2" charset="-127"/>
+                <a:ea typeface="페이퍼로지 5 Medium" pitchFamily="2" charset="-127"/>
+                <a:cs typeface="Pretendard Medium" panose="02000603000000020004" pitchFamily="2" charset="-127"/>
+              </a:rPr>
+              <a:t>※ </a:t>
+            </a:r>
+            <a:r>
+              <a:rPr sz="900" dirty="0" err="1">
+                <a:latin typeface="페이퍼로지 5 Medium" pitchFamily="2" charset="-127"/>
+                <a:ea typeface="페이퍼로지 5 Medium" pitchFamily="2" charset="-127"/>
+                <a:cs typeface="Pretendard Medium" panose="02000603000000020004" pitchFamily="2" charset="-127"/>
+              </a:rPr>
+              <a:t>현장</a:t>
+            </a:r>
+            <a:r>
+              <a:rPr sz="900" dirty="0">
+                <a:latin typeface="페이퍼로지 5 Medium" pitchFamily="2" charset="-127"/>
+                <a:ea typeface="페이퍼로지 5 Medium" pitchFamily="2" charset="-127"/>
+                <a:cs typeface="Pretendard Medium" panose="02000603000000020004" pitchFamily="2" charset="-127"/>
+              </a:rPr>
+              <a:t> </a:t>
+            </a:r>
+            <a:r>
+              <a:rPr sz="900" dirty="0" err="1">
+                <a:latin typeface="페이퍼로지 5 Medium" pitchFamily="2" charset="-127"/>
+                <a:ea typeface="페이퍼로지 5 Medium" pitchFamily="2" charset="-127"/>
+                <a:cs typeface="Pretendard Medium" panose="02000603000000020004" pitchFamily="2" charset="-127"/>
+              </a:rPr>
+              <a:t>결제</a:t>
+            </a:r>
+            <a:r>
+              <a:rPr sz="900" dirty="0">
+                <a:latin typeface="페이퍼로지 5 Medium" pitchFamily="2" charset="-127"/>
+                <a:ea typeface="페이퍼로지 5 Medium" pitchFamily="2" charset="-127"/>
+                <a:cs typeface="Pretendard Medium" panose="02000603000000020004" pitchFamily="2" charset="-127"/>
+              </a:rPr>
+              <a:t> </a:t>
+            </a:r>
+            <a:r>
+              <a:rPr sz="900" dirty="0" err="1">
+                <a:latin typeface="페이퍼로지 5 Medium" pitchFamily="2" charset="-127"/>
+                <a:ea typeface="페이퍼로지 5 Medium" pitchFamily="2" charset="-127"/>
+                <a:cs typeface="Pretendard Medium" panose="02000603000000020004" pitchFamily="2" charset="-127"/>
+              </a:rPr>
+              <a:t>불가</a:t>
+            </a:r>
+            <a:r>
+              <a:rPr sz="900" dirty="0">
+                <a:latin typeface="페이퍼로지 5 Medium" pitchFamily="2" charset="-127"/>
+                <a:ea typeface="페이퍼로지 5 Medium" pitchFamily="2" charset="-127"/>
+                <a:cs typeface="Pretendard Medium" panose="02000603000000020004" pitchFamily="2" charset="-127"/>
+              </a:rPr>
+              <a:t> (</a:t>
+            </a:r>
+            <a:r>
+              <a:rPr sz="900" dirty="0" err="1">
+                <a:latin typeface="페이퍼로지 5 Medium" pitchFamily="2" charset="-127"/>
+                <a:ea typeface="페이퍼로지 5 Medium" pitchFamily="2" charset="-127"/>
+                <a:cs typeface="Pretendard Medium" panose="02000603000000020004" pitchFamily="2" charset="-127"/>
+              </a:rPr>
+              <a:t>온라인</a:t>
+            </a:r>
+            <a:r>
+              <a:rPr sz="900" dirty="0">
+                <a:latin typeface="페이퍼로지 5 Medium" pitchFamily="2" charset="-127"/>
+                <a:ea typeface="페이퍼로지 5 Medium" pitchFamily="2" charset="-127"/>
+                <a:cs typeface="Pretendard Medium" panose="02000603000000020004" pitchFamily="2" charset="-127"/>
+              </a:rPr>
+              <a:t> </a:t>
+            </a:r>
+            <a:r>
+              <a:rPr sz="900" dirty="0" err="1">
+                <a:latin typeface="페이퍼로지 5 Medium" pitchFamily="2" charset="-127"/>
+                <a:ea typeface="페이퍼로지 5 Medium" pitchFamily="2" charset="-127"/>
+                <a:cs typeface="Pretendard Medium" panose="02000603000000020004" pitchFamily="2" charset="-127"/>
+              </a:rPr>
+              <a:t>결제만</a:t>
+            </a:r>
+            <a:r>
+              <a:rPr sz="900" dirty="0">
+                <a:latin typeface="페이퍼로지 5 Medium" pitchFamily="2" charset="-127"/>
+                <a:ea typeface="페이퍼로지 5 Medium" pitchFamily="2" charset="-127"/>
+                <a:cs typeface="Pretendard Medium" panose="02000603000000020004" pitchFamily="2" charset="-127"/>
+              </a:rPr>
+              <a:t> </a:t>
+            </a:r>
+            <a:r>
+              <a:rPr sz="900" dirty="0" err="1">
+                <a:latin typeface="페이퍼로지 5 Medium" pitchFamily="2" charset="-127"/>
+                <a:ea typeface="페이퍼로지 5 Medium" pitchFamily="2" charset="-127"/>
+                <a:cs typeface="Pretendard Medium" panose="02000603000000020004" pitchFamily="2" charset="-127"/>
+              </a:rPr>
+              <a:t>가능</a:t>
+            </a:r>
+            <a:r>
+              <a:rPr sz="900" dirty="0">
+                <a:latin typeface="페이퍼로지 5 Medium" pitchFamily="2" charset="-127"/>
+                <a:ea typeface="페이퍼로지 5 Medium" pitchFamily="2" charset="-127"/>
+                <a:cs typeface="Pretendard Medium" panose="02000603000000020004" pitchFamily="2" charset="-127"/>
+              </a:rPr>
+              <a:t>)</a:t>
             </a:r>
           </a:p>
         </p:txBody>
@@ -4715,7 +5440,7 @@
         <p:spPr>
           <a:xfrm>
             <a:off x="3780000" y="5148000"/>
-            <a:ext cx="3362400" cy="568800"/>
+            <a:ext cx="3362400" cy="1156968"/>
           </a:xfrm>
           <a:prstGeom prst="rect">
             <a:avLst/>
@@ -4729,7 +5454,13 @@
         </p:spPr>
         <p:txBody>
           <a:bodyPr/>
-          <a:p/>
+          <a:lstStyle/>
+          <a:p>
+            <a:endParaRPr>
+              <a:latin typeface="페이퍼로지 5 Medium" pitchFamily="2" charset="-127"/>
+              <a:ea typeface="페이퍼로지 5 Medium" pitchFamily="2" charset="-127"/>
+            </a:endParaRPr>
+          </a:p>
         </p:txBody>
       </p:sp>
       <p:sp>
@@ -4740,7 +5471,7 @@
         </p:nvSpPr>
         <p:spPr>
           <a:xfrm>
-            <a:off x="3924000" y="5176800"/>
+            <a:off x="3924000" y="5380000"/>
             <a:ext cx="3074400" cy="522000"/>
           </a:xfrm>
           <a:prstGeom prst="rect">
@@ -4751,7 +5482,7 @@
         </p:spPr>
         <p:txBody>
           <a:bodyPr wrap="square" lIns="25400" tIns="25400" rIns="25400" bIns="25400" rtlCol="0" anchor="ctr">
-            <a:normAutofit fontScale="92500" lnSpcReduction="20000"/>
+            <a:noAutofit/>
           </a:bodyPr>
           <a:lstStyle/>
           <a:p>
@@ -4766,12 +5497,48 @@
               <a:defRPr sz="1000"/>
             </a:pPr>
             <a:r>
-              <a:rPr sz="938" b="1"/>
-              <a:t>교재 수령 방법</a:t>
-            </a:r>
-            <a:endParaRPr lang="en-US" sz="863" dirty="0">
-              <a:latin typeface="Pretendard Medium" panose="02000603000000020004" pitchFamily="2" charset="-127"/>
-              <a:ea typeface="Pretendard Medium" panose="02000603000000020004" pitchFamily="2" charset="-127"/>
+              <a:rPr sz="900" b="1" dirty="0" err="1">
+                <a:latin typeface="페이퍼로지 5 Medium" pitchFamily="2" charset="-127"/>
+                <a:ea typeface="페이퍼로지 5 Medium" pitchFamily="2" charset="-127"/>
+                <a:cs typeface="Pretendard Medium" panose="02000603000000020004" pitchFamily="2" charset="-127"/>
+              </a:rPr>
+              <a:t>교재</a:t>
+            </a:r>
+            <a:r>
+              <a:rPr sz="900" b="1" dirty="0">
+                <a:latin typeface="페이퍼로지 5 Medium" pitchFamily="2" charset="-127"/>
+                <a:ea typeface="페이퍼로지 5 Medium" pitchFamily="2" charset="-127"/>
+                <a:cs typeface="Pretendard Medium" panose="02000603000000020004" pitchFamily="2" charset="-127"/>
+              </a:rPr>
+              <a:t> </a:t>
+            </a:r>
+            <a:r>
+              <a:rPr sz="900" b="1" dirty="0" err="1">
+                <a:latin typeface="페이퍼로지 5 Medium" pitchFamily="2" charset="-127"/>
+                <a:ea typeface="페이퍼로지 5 Medium" pitchFamily="2" charset="-127"/>
+                <a:cs typeface="Pretendard Medium" panose="02000603000000020004" pitchFamily="2" charset="-127"/>
+              </a:rPr>
+              <a:t>수령</a:t>
+            </a:r>
+            <a:r>
+              <a:rPr sz="900" b="1" dirty="0">
+                <a:latin typeface="페이퍼로지 5 Medium" pitchFamily="2" charset="-127"/>
+                <a:ea typeface="페이퍼로지 5 Medium" pitchFamily="2" charset="-127"/>
+                <a:cs typeface="Pretendard Medium" panose="02000603000000020004" pitchFamily="2" charset="-127"/>
+              </a:rPr>
+              <a:t> </a:t>
+            </a:r>
+            <a:r>
+              <a:rPr sz="900" b="1" dirty="0" err="1">
+                <a:latin typeface="페이퍼로지 5 Medium" pitchFamily="2" charset="-127"/>
+                <a:ea typeface="페이퍼로지 5 Medium" pitchFamily="2" charset="-127"/>
+                <a:cs typeface="Pretendard Medium" panose="02000603000000020004" pitchFamily="2" charset="-127"/>
+              </a:rPr>
+              <a:t>방법</a:t>
+            </a:r>
+            <a:endParaRPr lang="en-US" sz="900" dirty="0">
+              <a:latin typeface="페이퍼로지 5 Medium" pitchFamily="2" charset="-127"/>
+              <a:ea typeface="페이퍼로지 5 Medium" pitchFamily="2" charset="-127"/>
               <a:cs typeface="Pretendard Medium" panose="02000603000000020004" pitchFamily="2" charset="-127"/>
             </a:endParaRPr>
           </a:p>
@@ -4782,9 +5549,122 @@
               </a:lnSpc>
             </a:pPr>
             <a:r>
-              <a:rPr sz="1000"/>
-              <a:t>■  신규 교재 : 개강일 강의실 앞 / 개강일 이후 3층 입학처</a:t>
-            </a:r>
+              <a:rPr sz="900" dirty="0">
+                <a:latin typeface="페이퍼로지 5 Medium" pitchFamily="2" charset="-127"/>
+                <a:ea typeface="페이퍼로지 5 Medium" pitchFamily="2" charset="-127"/>
+                <a:cs typeface="Pretendard Medium" panose="02000603000000020004" pitchFamily="2" charset="-127"/>
+              </a:rPr>
+              <a:t>■  </a:t>
+            </a:r>
+            <a:r>
+              <a:rPr sz="900" dirty="0" err="1">
+                <a:latin typeface="페이퍼로지 5 Medium" pitchFamily="2" charset="-127"/>
+                <a:ea typeface="페이퍼로지 5 Medium" pitchFamily="2" charset="-127"/>
+                <a:cs typeface="Pretendard Medium" panose="02000603000000020004" pitchFamily="2" charset="-127"/>
+              </a:rPr>
+              <a:t>신규</a:t>
+            </a:r>
+            <a:r>
+              <a:rPr sz="900" dirty="0">
+                <a:latin typeface="페이퍼로지 5 Medium" pitchFamily="2" charset="-127"/>
+                <a:ea typeface="페이퍼로지 5 Medium" pitchFamily="2" charset="-127"/>
+                <a:cs typeface="Pretendard Medium" panose="02000603000000020004" pitchFamily="2" charset="-127"/>
+              </a:rPr>
+              <a:t> </a:t>
+            </a:r>
+            <a:r>
+              <a:rPr sz="900" dirty="0" err="1">
+                <a:latin typeface="페이퍼로지 5 Medium" pitchFamily="2" charset="-127"/>
+                <a:ea typeface="페이퍼로지 5 Medium" pitchFamily="2" charset="-127"/>
+                <a:cs typeface="Pretendard Medium" panose="02000603000000020004" pitchFamily="2" charset="-127"/>
+              </a:rPr>
+              <a:t>교재</a:t>
+            </a:r>
+            <a:r>
+              <a:rPr sz="900" dirty="0">
+                <a:latin typeface="페이퍼로지 5 Medium" pitchFamily="2" charset="-127"/>
+                <a:ea typeface="페이퍼로지 5 Medium" pitchFamily="2" charset="-127"/>
+                <a:cs typeface="Pretendard Medium" panose="02000603000000020004" pitchFamily="2" charset="-127"/>
+              </a:rPr>
+              <a:t> : </a:t>
+            </a:r>
+            <a:r>
+              <a:rPr sz="900" dirty="0" err="1">
+                <a:latin typeface="페이퍼로지 5 Medium" pitchFamily="2" charset="-127"/>
+                <a:ea typeface="페이퍼로지 5 Medium" pitchFamily="2" charset="-127"/>
+                <a:cs typeface="Pretendard Medium" panose="02000603000000020004" pitchFamily="2" charset="-127"/>
+              </a:rPr>
+              <a:t>개강일</a:t>
+            </a:r>
+            <a:r>
+              <a:rPr sz="900" dirty="0">
+                <a:latin typeface="페이퍼로지 5 Medium" pitchFamily="2" charset="-127"/>
+                <a:ea typeface="페이퍼로지 5 Medium" pitchFamily="2" charset="-127"/>
+                <a:cs typeface="Pretendard Medium" panose="02000603000000020004" pitchFamily="2" charset="-127"/>
+              </a:rPr>
+              <a:t> </a:t>
+            </a:r>
+            <a:r>
+              <a:rPr sz="900" dirty="0" err="1">
+                <a:latin typeface="페이퍼로지 5 Medium" pitchFamily="2" charset="-127"/>
+                <a:ea typeface="페이퍼로지 5 Medium" pitchFamily="2" charset="-127"/>
+                <a:cs typeface="Pretendard Medium" panose="02000603000000020004" pitchFamily="2" charset="-127"/>
+              </a:rPr>
+              <a:t>강의실</a:t>
+            </a:r>
+            <a:r>
+              <a:rPr sz="900" dirty="0">
+                <a:latin typeface="페이퍼로지 5 Medium" pitchFamily="2" charset="-127"/>
+                <a:ea typeface="페이퍼로지 5 Medium" pitchFamily="2" charset="-127"/>
+                <a:cs typeface="Pretendard Medium" panose="02000603000000020004" pitchFamily="2" charset="-127"/>
+              </a:rPr>
+              <a:t> 앞 / </a:t>
+            </a:r>
+            <a:r>
+              <a:rPr sz="900" dirty="0" err="1">
+                <a:latin typeface="페이퍼로지 5 Medium" pitchFamily="2" charset="-127"/>
+                <a:ea typeface="페이퍼로지 5 Medium" pitchFamily="2" charset="-127"/>
+                <a:cs typeface="Pretendard Medium" panose="02000603000000020004" pitchFamily="2" charset="-127"/>
+              </a:rPr>
+              <a:t>개강일</a:t>
+            </a:r>
+            <a:r>
+              <a:rPr sz="900" dirty="0">
+                <a:latin typeface="페이퍼로지 5 Medium" pitchFamily="2" charset="-127"/>
+                <a:ea typeface="페이퍼로지 5 Medium" pitchFamily="2" charset="-127"/>
+                <a:cs typeface="Pretendard Medium" panose="02000603000000020004" pitchFamily="2" charset="-127"/>
+              </a:rPr>
+              <a:t> </a:t>
+            </a:r>
+            <a:r>
+              <a:rPr sz="900" dirty="0" err="1">
+                <a:latin typeface="페이퍼로지 5 Medium" pitchFamily="2" charset="-127"/>
+                <a:ea typeface="페이퍼로지 5 Medium" pitchFamily="2" charset="-127"/>
+                <a:cs typeface="Pretendard Medium" panose="02000603000000020004" pitchFamily="2" charset="-127"/>
+              </a:rPr>
+              <a:t>이후</a:t>
+            </a:r>
+            <a:r>
+              <a:rPr sz="900" dirty="0">
+                <a:latin typeface="페이퍼로지 5 Medium" pitchFamily="2" charset="-127"/>
+                <a:ea typeface="페이퍼로지 5 Medium" pitchFamily="2" charset="-127"/>
+                <a:cs typeface="Pretendard Medium" panose="02000603000000020004" pitchFamily="2" charset="-127"/>
+              </a:rPr>
+              <a:t> 3층 </a:t>
+            </a:r>
+            <a:r>
+              <a:rPr sz="900" dirty="0" err="1">
+                <a:latin typeface="페이퍼로지 5 Medium" pitchFamily="2" charset="-127"/>
+                <a:ea typeface="페이퍼로지 5 Medium" pitchFamily="2" charset="-127"/>
+                <a:cs typeface="Pretendard Medium" panose="02000603000000020004" pitchFamily="2" charset="-127"/>
+              </a:rPr>
+              <a:t>입학처</a:t>
+            </a:r>
+            <a:endParaRPr sz="900" dirty="0">
+              <a:latin typeface="페이퍼로지 5 Medium" pitchFamily="2" charset="-127"/>
+              <a:ea typeface="페이퍼로지 5 Medium" pitchFamily="2" charset="-127"/>
+              <a:cs typeface="Pretendard Medium" panose="02000603000000020004" pitchFamily="2" charset="-127"/>
+            </a:endParaRPr>
           </a:p>
           <a:p>
             <a:pPr>
@@ -4793,9 +5673,58 @@
               </a:lnSpc>
             </a:pPr>
             <a:r>
-              <a:rPr sz="1000"/>
-              <a:t>■  기존 교재 : 3층 입학처</a:t>
-            </a:r>
+              <a:rPr sz="900" dirty="0">
+                <a:latin typeface="페이퍼로지 5 Medium" pitchFamily="2" charset="-127"/>
+                <a:ea typeface="페이퍼로지 5 Medium" pitchFamily="2" charset="-127"/>
+                <a:cs typeface="Pretendard Medium" panose="02000603000000020004" pitchFamily="2" charset="-127"/>
+              </a:rPr>
+              <a:t>■  </a:t>
+            </a:r>
+            <a:r>
+              <a:rPr sz="900" dirty="0" err="1">
+                <a:latin typeface="페이퍼로지 5 Medium" pitchFamily="2" charset="-127"/>
+                <a:ea typeface="페이퍼로지 5 Medium" pitchFamily="2" charset="-127"/>
+                <a:cs typeface="Pretendard Medium" panose="02000603000000020004" pitchFamily="2" charset="-127"/>
+              </a:rPr>
+              <a:t>기존</a:t>
+            </a:r>
+            <a:r>
+              <a:rPr sz="900" dirty="0">
+                <a:latin typeface="페이퍼로지 5 Medium" pitchFamily="2" charset="-127"/>
+                <a:ea typeface="페이퍼로지 5 Medium" pitchFamily="2" charset="-127"/>
+                <a:cs typeface="Pretendard Medium" panose="02000603000000020004" pitchFamily="2" charset="-127"/>
+              </a:rPr>
+              <a:t> </a:t>
+            </a:r>
+            <a:r>
+              <a:rPr sz="900" dirty="0" err="1">
+                <a:latin typeface="페이퍼로지 5 Medium" pitchFamily="2" charset="-127"/>
+                <a:ea typeface="페이퍼로지 5 Medium" pitchFamily="2" charset="-127"/>
+                <a:cs typeface="Pretendard Medium" panose="02000603000000020004" pitchFamily="2" charset="-127"/>
+              </a:rPr>
+              <a:t>교재</a:t>
+            </a:r>
+            <a:r>
+              <a:rPr sz="900" dirty="0">
+                <a:latin typeface="페이퍼로지 5 Medium" pitchFamily="2" charset="-127"/>
+                <a:ea typeface="페이퍼로지 5 Medium" pitchFamily="2" charset="-127"/>
+                <a:cs typeface="Pretendard Medium" panose="02000603000000020004" pitchFamily="2" charset="-127"/>
+              </a:rPr>
+              <a:t> : 3층 </a:t>
+            </a:r>
+            <a:r>
+              <a:rPr sz="900" dirty="0" err="1">
+                <a:latin typeface="페이퍼로지 5 Medium" pitchFamily="2" charset="-127"/>
+                <a:ea typeface="페이퍼로지 5 Medium" pitchFamily="2" charset="-127"/>
+                <a:cs typeface="Pretendard Medium" panose="02000603000000020004" pitchFamily="2" charset="-127"/>
+              </a:rPr>
+              <a:t>입학처</a:t>
+            </a:r>
+            <a:endParaRPr sz="900" dirty="0">
+              <a:latin typeface="페이퍼로지 5 Medium" pitchFamily="2" charset="-127"/>
+              <a:ea typeface="페이퍼로지 5 Medium" pitchFamily="2" charset="-127"/>
+              <a:cs typeface="Pretendard Medium" panose="02000603000000020004" pitchFamily="2" charset="-127"/>
+            </a:endParaRPr>
           </a:p>
           <a:p>
             <a:pPr>
@@ -4804,9 +5733,58 @@
               </a:lnSpc>
             </a:pPr>
             <a:r>
-              <a:rPr sz="1000"/>
-              <a:t>※ 미구매 시 수령 불가</a:t>
-            </a:r>
+              <a:rPr sz="900" dirty="0">
+                <a:latin typeface="페이퍼로지 5 Medium" pitchFamily="2" charset="-127"/>
+                <a:ea typeface="페이퍼로지 5 Medium" pitchFamily="2" charset="-127"/>
+                <a:cs typeface="Pretendard Medium" panose="02000603000000020004" pitchFamily="2" charset="-127"/>
+              </a:rPr>
+              <a:t>※ </a:t>
+            </a:r>
+            <a:r>
+              <a:rPr sz="900" dirty="0" err="1">
+                <a:latin typeface="페이퍼로지 5 Medium" pitchFamily="2" charset="-127"/>
+                <a:ea typeface="페이퍼로지 5 Medium" pitchFamily="2" charset="-127"/>
+                <a:cs typeface="Pretendard Medium" panose="02000603000000020004" pitchFamily="2" charset="-127"/>
+              </a:rPr>
+              <a:t>미구매</a:t>
+            </a:r>
+            <a:r>
+              <a:rPr sz="900" dirty="0">
+                <a:latin typeface="페이퍼로지 5 Medium" pitchFamily="2" charset="-127"/>
+                <a:ea typeface="페이퍼로지 5 Medium" pitchFamily="2" charset="-127"/>
+                <a:cs typeface="Pretendard Medium" panose="02000603000000020004" pitchFamily="2" charset="-127"/>
+              </a:rPr>
+              <a:t> 시 </a:t>
+            </a:r>
+            <a:r>
+              <a:rPr sz="900" dirty="0" err="1">
+                <a:latin typeface="페이퍼로지 5 Medium" pitchFamily="2" charset="-127"/>
+                <a:ea typeface="페이퍼로지 5 Medium" pitchFamily="2" charset="-127"/>
+                <a:cs typeface="Pretendard Medium" panose="02000603000000020004" pitchFamily="2" charset="-127"/>
+              </a:rPr>
+              <a:t>수령</a:t>
+            </a:r>
+            <a:r>
+              <a:rPr sz="900" dirty="0">
+                <a:latin typeface="페이퍼로지 5 Medium" pitchFamily="2" charset="-127"/>
+                <a:ea typeface="페이퍼로지 5 Medium" pitchFamily="2" charset="-127"/>
+                <a:cs typeface="Pretendard Medium" panose="02000603000000020004" pitchFamily="2" charset="-127"/>
+              </a:rPr>
+              <a:t> </a:t>
+            </a:r>
+            <a:r>
+              <a:rPr sz="900" dirty="0" err="1">
+                <a:latin typeface="페이퍼로지 5 Medium" pitchFamily="2" charset="-127"/>
+                <a:ea typeface="페이퍼로지 5 Medium" pitchFamily="2" charset="-127"/>
+                <a:cs typeface="Pretendard Medium" panose="02000603000000020004" pitchFamily="2" charset="-127"/>
+              </a:rPr>
+              <a:t>불가</a:t>
+            </a:r>
+            <a:endParaRPr sz="900" dirty="0">
+              <a:latin typeface="페이퍼로지 5 Medium" pitchFamily="2" charset="-127"/>
+              <a:ea typeface="페이퍼로지 5 Medium" pitchFamily="2" charset="-127"/>
+              <a:cs typeface="Pretendard Medium" panose="02000603000000020004" pitchFamily="2" charset="-127"/>
+            </a:endParaRPr>
           </a:p>
         </p:txBody>
       </p:sp>
